--- a/ゲーム科1年/00_前期/ゲームプログラミングⅢ/ゲーム数学/実習/10_視野角判定.pptx
+++ b/ゲーム科1年/00_前期/ゲームプログラミングⅢ/ゲーム数学/実習/10_視野角判定.pptx
@@ -8,6 +8,15 @@
     <p:sldId id="256" r:id="rId2"/>
     <p:sldId id="258" r:id="rId3"/>
     <p:sldId id="257" r:id="rId4"/>
+    <p:sldId id="259" r:id="rId5"/>
+    <p:sldId id="260" r:id="rId6"/>
+    <p:sldId id="261" r:id="rId7"/>
+    <p:sldId id="264" r:id="rId8"/>
+    <p:sldId id="265" r:id="rId9"/>
+    <p:sldId id="266" r:id="rId10"/>
+    <p:sldId id="267" r:id="rId11"/>
+    <p:sldId id="262" r:id="rId12"/>
+    <p:sldId id="268" r:id="rId13"/>
   </p:sldIdLst>
   <p:sldSz cx="12192000" cy="6858000"/>
   <p:notesSz cx="6858000" cy="9144000"/>
@@ -261,7 +270,7 @@
           <a:p>
             <a:fld id="{E9CC885B-4903-4D54-9A93-00025F12DED9}" type="datetimeFigureOut">
               <a:rPr kumimoji="1" lang="ja-JP" altLang="en-US" smtClean="0"/>
-              <a:t>2024/8/27</a:t>
+              <a:t>2025/1/8</a:t>
             </a:fld>
             <a:endParaRPr kumimoji="1" lang="ja-JP" altLang="en-US"/>
           </a:p>
@@ -491,7 +500,7 @@
           <a:p>
             <a:fld id="{E9CC885B-4903-4D54-9A93-00025F12DED9}" type="datetimeFigureOut">
               <a:rPr kumimoji="1" lang="ja-JP" altLang="en-US" smtClean="0"/>
-              <a:t>2024/8/27</a:t>
+              <a:t>2025/1/8</a:t>
             </a:fld>
             <a:endParaRPr kumimoji="1" lang="ja-JP" altLang="en-US"/>
           </a:p>
@@ -731,7 +740,7 @@
           <a:p>
             <a:fld id="{E9CC885B-4903-4D54-9A93-00025F12DED9}" type="datetimeFigureOut">
               <a:rPr kumimoji="1" lang="ja-JP" altLang="en-US" smtClean="0"/>
-              <a:t>2024/8/27</a:t>
+              <a:t>2025/1/8</a:t>
             </a:fld>
             <a:endParaRPr kumimoji="1" lang="ja-JP" altLang="en-US"/>
           </a:p>
@@ -961,7 +970,7 @@
           <a:p>
             <a:fld id="{E9CC885B-4903-4D54-9A93-00025F12DED9}" type="datetimeFigureOut">
               <a:rPr kumimoji="1" lang="ja-JP" altLang="en-US" smtClean="0"/>
-              <a:t>2024/8/27</a:t>
+              <a:t>2025/1/8</a:t>
             </a:fld>
             <a:endParaRPr kumimoji="1" lang="ja-JP" altLang="en-US"/>
           </a:p>
@@ -1236,7 +1245,7 @@
           <a:p>
             <a:fld id="{E9CC885B-4903-4D54-9A93-00025F12DED9}" type="datetimeFigureOut">
               <a:rPr kumimoji="1" lang="ja-JP" altLang="en-US" smtClean="0"/>
-              <a:t>2024/8/27</a:t>
+              <a:t>2025/1/8</a:t>
             </a:fld>
             <a:endParaRPr kumimoji="1" lang="ja-JP" altLang="en-US"/>
           </a:p>
@@ -1565,7 +1574,7 @@
           <a:p>
             <a:fld id="{E9CC885B-4903-4D54-9A93-00025F12DED9}" type="datetimeFigureOut">
               <a:rPr kumimoji="1" lang="ja-JP" altLang="en-US" smtClean="0"/>
-              <a:t>2024/8/27</a:t>
+              <a:t>2025/1/8</a:t>
             </a:fld>
             <a:endParaRPr kumimoji="1" lang="ja-JP" altLang="en-US"/>
           </a:p>
@@ -2041,7 +2050,7 @@
           <a:p>
             <a:fld id="{E9CC885B-4903-4D54-9A93-00025F12DED9}" type="datetimeFigureOut">
               <a:rPr kumimoji="1" lang="ja-JP" altLang="en-US" smtClean="0"/>
-              <a:t>2024/8/27</a:t>
+              <a:t>2025/1/8</a:t>
             </a:fld>
             <a:endParaRPr kumimoji="1" lang="ja-JP" altLang="en-US"/>
           </a:p>
@@ -2182,7 +2191,7 @@
           <a:p>
             <a:fld id="{E9CC885B-4903-4D54-9A93-00025F12DED9}" type="datetimeFigureOut">
               <a:rPr kumimoji="1" lang="ja-JP" altLang="en-US" smtClean="0"/>
-              <a:t>2024/8/27</a:t>
+              <a:t>2025/1/8</a:t>
             </a:fld>
             <a:endParaRPr kumimoji="1" lang="ja-JP" altLang="en-US"/>
           </a:p>
@@ -2295,7 +2304,7 @@
           <a:p>
             <a:fld id="{E9CC885B-4903-4D54-9A93-00025F12DED9}" type="datetimeFigureOut">
               <a:rPr kumimoji="1" lang="ja-JP" altLang="en-US" smtClean="0"/>
-              <a:t>2024/8/27</a:t>
+              <a:t>2025/1/8</a:t>
             </a:fld>
             <a:endParaRPr kumimoji="1" lang="ja-JP" altLang="en-US"/>
           </a:p>
@@ -2638,7 +2647,7 @@
           <a:p>
             <a:fld id="{E9CC885B-4903-4D54-9A93-00025F12DED9}" type="datetimeFigureOut">
               <a:rPr kumimoji="1" lang="ja-JP" altLang="en-US" smtClean="0"/>
-              <a:t>2024/8/27</a:t>
+              <a:t>2025/1/8</a:t>
             </a:fld>
             <a:endParaRPr kumimoji="1" lang="ja-JP" altLang="en-US"/>
           </a:p>
@@ -2926,7 +2935,7 @@
           <a:p>
             <a:fld id="{E9CC885B-4903-4D54-9A93-00025F12DED9}" type="datetimeFigureOut">
               <a:rPr kumimoji="1" lang="ja-JP" altLang="en-US" smtClean="0"/>
-              <a:t>2024/8/27</a:t>
+              <a:t>2025/1/8</a:t>
             </a:fld>
             <a:endParaRPr kumimoji="1" lang="ja-JP" altLang="en-US"/>
           </a:p>
@@ -3199,7 +3208,7 @@
           <a:p>
             <a:fld id="{E9CC885B-4903-4D54-9A93-00025F12DED9}" type="datetimeFigureOut">
               <a:rPr kumimoji="1" lang="ja-JP" altLang="en-US" smtClean="0"/>
-              <a:t>2024/8/27</a:t>
+              <a:t>2025/1/8</a:t>
             </a:fld>
             <a:endParaRPr kumimoji="1" lang="ja-JP" altLang="en-US"/>
           </a:p>
@@ -3631,7 +3640,7 @@
         <p:spPr>
           <a:xfrm>
             <a:off x="567542" y="491954"/>
-            <a:ext cx="2504212" cy="584775"/>
+            <a:ext cx="2236510" cy="584775"/>
           </a:xfrm>
           <a:prstGeom prst="rect">
             <a:avLst/>
@@ -3645,12 +3654,8 @@
           <a:lstStyle/>
           <a:p>
             <a:r>
-              <a:rPr kumimoji="1" lang="en-US" altLang="ja-JP" sz="3200" b="1" u="sng" dirty="0"/>
-              <a:t>DirectX</a:t>
-            </a:r>
-            <a:r>
               <a:rPr kumimoji="1" lang="ja-JP" altLang="en-US" sz="3200" b="1" u="sng" dirty="0"/>
-              <a:t>とは</a:t>
+              <a:t>視野角判定</a:t>
             </a:r>
           </a:p>
         </p:txBody>
@@ -3670,7 +3675,7 @@
         <p:spPr>
           <a:xfrm>
             <a:off x="567542" y="1216429"/>
-            <a:ext cx="10033516" cy="3785652"/>
+            <a:ext cx="7879080" cy="461665"/>
           </a:xfrm>
           <a:prstGeom prst="rect">
             <a:avLst/>
@@ -3684,128 +3689,925 @@
           <a:lstStyle/>
           <a:p>
             <a:r>
-              <a:rPr kumimoji="1" lang="en-US" altLang="ja-JP" sz="2400" b="1" dirty="0">
-                <a:solidFill>
-                  <a:srgbClr val="FF0000"/>
-                </a:solidFill>
-              </a:rPr>
-              <a:t>DirectX</a:t>
-            </a:r>
-            <a:r>
               <a:rPr kumimoji="1" lang="ja-JP" altLang="en-US" sz="2400" dirty="0"/>
-              <a:t>とはゲーム制作には欠かせない、</a:t>
+              <a:t>視野角度を指定した、正確な視野角判定を実装します。</a:t>
             </a:r>
             <a:endParaRPr kumimoji="1" lang="en-US" altLang="ja-JP" sz="2400" dirty="0"/>
           </a:p>
-          <a:p>
-            <a:r>
-              <a:rPr kumimoji="1" lang="ja-JP" altLang="en-US" sz="2400" b="1" dirty="0">
-                <a:solidFill>
-                  <a:srgbClr val="FF0000"/>
-                </a:solidFill>
-              </a:rPr>
-              <a:t>画像、音声、コントローラー入力などをサポートしたライブラリ</a:t>
-            </a:r>
-            <a:r>
-              <a:rPr kumimoji="1" lang="ja-JP" altLang="en-US" sz="2400" dirty="0"/>
-              <a:t>です。</a:t>
-            </a:r>
-            <a:endParaRPr kumimoji="1" lang="en-US" altLang="ja-JP" sz="2400" dirty="0"/>
-          </a:p>
-          <a:p>
-            <a:endParaRPr lang="en-US" altLang="ja-JP" sz="2400" dirty="0"/>
-          </a:p>
-          <a:p>
-            <a:r>
-              <a:rPr kumimoji="1" lang="en-US" altLang="ja-JP" sz="2400" dirty="0"/>
-              <a:t>1995</a:t>
-            </a:r>
-            <a:r>
-              <a:rPr kumimoji="1" lang="ja-JP" altLang="en-US" sz="2400" dirty="0"/>
-              <a:t>年に</a:t>
-            </a:r>
-            <a:r>
-              <a:rPr kumimoji="1" lang="en-US" altLang="ja-JP" sz="2400" dirty="0"/>
-              <a:t>Micro Soft</a:t>
-            </a:r>
-            <a:r>
-              <a:rPr kumimoji="1" lang="ja-JP" altLang="en-US" sz="2400" dirty="0"/>
-              <a:t>が公開したもので、</a:t>
-            </a:r>
-            <a:endParaRPr kumimoji="1" lang="en-US" altLang="ja-JP" sz="2400" dirty="0"/>
-          </a:p>
-          <a:p>
-            <a:r>
-              <a:rPr lang="en-US" altLang="ja-JP" sz="2400" dirty="0"/>
-              <a:t>PC</a:t>
-            </a:r>
-            <a:r>
-              <a:rPr lang="ja-JP" altLang="en-US" sz="2400" dirty="0"/>
-              <a:t>ゲームを制作するには欠かせないものでした。</a:t>
-            </a:r>
-            <a:endParaRPr lang="en-US" altLang="ja-JP" sz="2400" dirty="0"/>
-          </a:p>
-          <a:p>
-            <a:endParaRPr kumimoji="1" lang="en-US" altLang="ja-JP" sz="2400" dirty="0"/>
-          </a:p>
-          <a:p>
-            <a:r>
-              <a:rPr lang="ja-JP" altLang="en-US" sz="2400" dirty="0"/>
-              <a:t>公開後から技術の進歩に連れてバージョンアップされており、</a:t>
-            </a:r>
-            <a:endParaRPr lang="en-US" altLang="ja-JP" sz="2400" dirty="0"/>
-          </a:p>
-          <a:p>
-            <a:r>
-              <a:rPr kumimoji="1" lang="ja-JP" altLang="en-US" sz="2400" dirty="0"/>
-              <a:t>最新版は</a:t>
-            </a:r>
-            <a:r>
-              <a:rPr kumimoji="1" lang="en-US" altLang="ja-JP" sz="2400" dirty="0"/>
-              <a:t>2015</a:t>
-            </a:r>
-            <a:r>
-              <a:rPr kumimoji="1" lang="ja-JP" altLang="en-US" sz="2400" dirty="0"/>
-              <a:t>年に公開された</a:t>
-            </a:r>
-            <a:r>
-              <a:rPr kumimoji="1" lang="en-US" altLang="ja-JP" sz="2400" dirty="0"/>
-              <a:t>DirectX12</a:t>
-            </a:r>
-            <a:r>
-              <a:rPr kumimoji="1" lang="ja-JP" altLang="en-US" sz="2400" dirty="0"/>
-              <a:t>になります。</a:t>
-            </a:r>
-            <a:endParaRPr kumimoji="1" lang="en-US" altLang="ja-JP" sz="2400" dirty="0"/>
-          </a:p>
-          <a:p>
-            <a:endParaRPr lang="en-US" altLang="ja-JP" sz="2400" dirty="0"/>
-          </a:p>
-          <a:p>
-            <a:r>
-              <a:rPr kumimoji="1" lang="en-US" altLang="ja-JP" sz="2400" dirty="0"/>
-              <a:t>※2020</a:t>
-            </a:r>
-            <a:r>
-              <a:rPr kumimoji="1" lang="ja-JP" altLang="en-US" sz="2400" dirty="0"/>
-              <a:t>年に</a:t>
-            </a:r>
-            <a:r>
-              <a:rPr kumimoji="1" lang="en-US" altLang="ja-JP" sz="2400" dirty="0"/>
-              <a:t>DirectX12 Ultimate</a:t>
-            </a:r>
-            <a:r>
-              <a:rPr kumimoji="1" lang="ja-JP" altLang="en-US" sz="2400" dirty="0"/>
-              <a:t>なるものが一応公開されている</a:t>
-            </a:r>
-            <a:endParaRPr kumimoji="1" lang="en-US" altLang="ja-JP" sz="2400" dirty="0"/>
-          </a:p>
-        </p:txBody>
-      </p:sp>
+        </p:txBody>
+      </p:sp>
+      <p:pic>
+        <p:nvPicPr>
+          <p:cNvPr id="3" name="図 2">
+            <a:extLst>
+              <a:ext uri="{FF2B5EF4-FFF2-40B4-BE49-F238E27FC236}">
+                <a16:creationId xmlns:a16="http://schemas.microsoft.com/office/drawing/2014/main" id="{F0B55D93-1E09-4A38-B2F1-FC0441A2B094}"/>
+              </a:ext>
+            </a:extLst>
+          </p:cNvPr>
+          <p:cNvPicPr>
+            <a:picLocks noChangeAspect="1"/>
+          </p:cNvPicPr>
+          <p:nvPr/>
+        </p:nvPicPr>
+        <p:blipFill>
+          <a:blip r:embed="rId2"/>
+          <a:stretch>
+            <a:fillRect/>
+          </a:stretch>
+        </p:blipFill>
+        <p:spPr>
+          <a:xfrm>
+            <a:off x="567541" y="1817794"/>
+            <a:ext cx="6615639" cy="4548252"/>
+          </a:xfrm>
+          <a:prstGeom prst="rect">
+            <a:avLst/>
+          </a:prstGeom>
+        </p:spPr>
+      </p:pic>
     </p:spTree>
     <p:extLst>
       <p:ext uri="{BB962C8B-B14F-4D97-AF65-F5344CB8AC3E}">
         <p14:creationId xmlns:p14="http://schemas.microsoft.com/office/powerpoint/2010/main" val="410028988"/>
+      </p:ext>
+    </p:extLst>
+  </p:cSld>
+  <p:clrMapOvr>
+    <a:masterClrMapping/>
+  </p:clrMapOvr>
+</p:sld>
+</file>
+
+<file path=ppt/slides/slide10.xml><?xml version="1.0" encoding="utf-8"?>
+<p:sld xmlns:a="http://schemas.openxmlformats.org/drawingml/2006/main" xmlns:r="http://schemas.openxmlformats.org/officeDocument/2006/relationships" xmlns:p="http://schemas.openxmlformats.org/presentationml/2006/main">
+  <p:cSld>
+    <p:spTree>
+      <p:nvGrpSpPr>
+        <p:cNvPr id="1" name=""/>
+        <p:cNvGrpSpPr/>
+        <p:nvPr/>
+      </p:nvGrpSpPr>
+      <p:grpSpPr>
+        <a:xfrm>
+          <a:off x="0" y="0"/>
+          <a:ext cx="0" cy="0"/>
+          <a:chOff x="0" y="0"/>
+          <a:chExt cx="0" cy="0"/>
+        </a:xfrm>
+      </p:grpSpPr>
+      <p:sp>
+        <p:nvSpPr>
+          <p:cNvPr id="4" name="テキスト ボックス 3">
+            <a:extLst>
+              <a:ext uri="{FF2B5EF4-FFF2-40B4-BE49-F238E27FC236}">
+                <a16:creationId xmlns:a16="http://schemas.microsoft.com/office/drawing/2014/main" id="{5A13BF46-B8C5-48AA-8308-C9ECFF431A18}"/>
+              </a:ext>
+            </a:extLst>
+          </p:cNvPr>
+          <p:cNvSpPr txBox="1"/>
+          <p:nvPr/>
+        </p:nvSpPr>
+        <p:spPr>
+          <a:xfrm>
+            <a:off x="567542" y="491954"/>
+            <a:ext cx="3584636" cy="584775"/>
+          </a:xfrm>
+          <a:prstGeom prst="rect">
+            <a:avLst/>
+          </a:prstGeom>
+          <a:noFill/>
+        </p:spPr>
+        <p:txBody>
+          <a:bodyPr wrap="none" rtlCol="0">
+            <a:spAutoFit/>
+          </a:bodyPr>
+          <a:lstStyle/>
+          <a:p>
+            <a:r>
+              <a:rPr kumimoji="1" lang="ja-JP" altLang="en-US" sz="3200" b="1" u="sng" dirty="0"/>
+              <a:t>視野角判定 仕組み</a:t>
+            </a:r>
+          </a:p>
+        </p:txBody>
+      </p:sp>
+      <mc:AlternateContent xmlns:mc="http://schemas.openxmlformats.org/markup-compatibility/2006">
+        <mc:Choice xmlns:a14="http://schemas.microsoft.com/office/drawing/2010/main" Requires="a14">
+          <p:sp>
+            <p:nvSpPr>
+              <p:cNvPr id="6" name="テキスト ボックス 5">
+                <a:extLst>
+                  <a:ext uri="{FF2B5EF4-FFF2-40B4-BE49-F238E27FC236}">
+                    <a16:creationId xmlns:a16="http://schemas.microsoft.com/office/drawing/2014/main" id="{55830AD6-028B-4C4E-80BF-B70DFC1C3A46}"/>
+                  </a:ext>
+                </a:extLst>
+              </p:cNvPr>
+              <p:cNvSpPr txBox="1"/>
+              <p:nvPr/>
+            </p:nvSpPr>
+            <p:spPr>
+              <a:xfrm>
+                <a:off x="567542" y="1216429"/>
+                <a:ext cx="8685391" cy="3049809"/>
+              </a:xfrm>
+              <a:prstGeom prst="rect">
+                <a:avLst/>
+              </a:prstGeom>
+              <a:noFill/>
+            </p:spPr>
+            <p:txBody>
+              <a:bodyPr wrap="none" rtlCol="0">
+                <a:spAutoFit/>
+              </a:bodyPr>
+              <a:lstStyle/>
+              <a:p>
+                <a:r>
+                  <a:rPr lang="ja-JP" altLang="en-US" sz="2400" dirty="0"/>
+                  <a:t>またベクトル</a:t>
+                </a:r>
+                <a:r>
+                  <a:rPr lang="en-US" altLang="ja-JP" sz="2400" dirty="0"/>
+                  <a:t>B,C</a:t>
+                </a:r>
+                <a:r>
+                  <a:rPr lang="ja-JP" altLang="en-US" sz="2400" dirty="0"/>
+                  <a:t>は共に</a:t>
+                </a:r>
+                <a:r>
+                  <a:rPr lang="ja-JP" altLang="en-US" sz="2400" b="1" dirty="0">
+                    <a:solidFill>
+                      <a:srgbClr val="FF0000"/>
+                    </a:solidFill>
+                  </a:rPr>
+                  <a:t>正規化</a:t>
+                </a:r>
+                <a:r>
+                  <a:rPr lang="ja-JP" altLang="en-US" sz="2400" dirty="0"/>
+                  <a:t>されているので</a:t>
+                </a:r>
+                <a:r>
+                  <a:rPr lang="ja-JP" altLang="en-US" sz="2400" b="1" dirty="0">
+                    <a:solidFill>
+                      <a:srgbClr val="FF0000"/>
+                    </a:solidFill>
+                  </a:rPr>
+                  <a:t>長さは１</a:t>
+                </a:r>
+                <a:r>
+                  <a:rPr lang="ja-JP" altLang="en-US" sz="2400" dirty="0"/>
+                  <a:t>です。</a:t>
+                </a:r>
+                <a:endParaRPr lang="en-US" altLang="ja-JP" sz="2400" dirty="0"/>
+              </a:p>
+              <a:p>
+                <a:r>
+                  <a:rPr lang="ja-JP" altLang="en-US" sz="2400" dirty="0"/>
+                  <a:t>つまり以下のように計算できます。</a:t>
+                </a:r>
+                <a:endParaRPr lang="en-US" altLang="ja-JP" sz="2400" dirty="0"/>
+              </a:p>
+              <a:p>
+                <a:endParaRPr lang="en-US" altLang="ja-JP" sz="2400" dirty="0"/>
+              </a:p>
+              <a:p>
+                <a14:m>
+                  <m:oMath xmlns:m="http://schemas.openxmlformats.org/officeDocument/2006/math">
+                    <m:r>
+                      <m:rPr>
+                        <m:sty m:val="p"/>
+                      </m:rPr>
+                      <a:rPr lang="en-US" altLang="ja-JP" sz="2400" i="0">
+                        <a:latin typeface="Cambria Math" panose="02040503050406030204" pitchFamily="18" charset="0"/>
+                      </a:rPr>
+                      <m:t>C</m:t>
+                    </m:r>
+                    <m:r>
+                      <a:rPr lang="ja-JP" altLang="en-US" sz="2400" i="0">
+                        <a:latin typeface="Cambria Math" panose="02040503050406030204" pitchFamily="18" charset="0"/>
+                      </a:rPr>
+                      <m:t>・</m:t>
+                    </m:r>
+                    <m:r>
+                      <m:rPr>
+                        <m:sty m:val="p"/>
+                      </m:rPr>
+                      <a:rPr lang="en-US" altLang="ja-JP" sz="2400" i="0">
+                        <a:latin typeface="Cambria Math" panose="02040503050406030204" pitchFamily="18" charset="0"/>
+                      </a:rPr>
+                      <m:t>B</m:t>
+                    </m:r>
+                    <m:r>
+                      <a:rPr lang="en-US" altLang="ja-JP" sz="2400" b="0" i="0" smtClean="0">
+                        <a:latin typeface="Cambria Math" panose="02040503050406030204" pitchFamily="18" charset="0"/>
+                      </a:rPr>
+                      <m:t>=|</m:t>
+                    </m:r>
+                    <m:d>
+                      <m:dPr>
+                        <m:begChr m:val="|"/>
+                        <m:endChr m:val="|"/>
+                        <m:ctrlPr>
+                          <a:rPr lang="en-US" altLang="ja-JP" sz="2400" b="0" smtClean="0">
+                            <a:latin typeface="Cambria Math" panose="02040503050406030204" pitchFamily="18" charset="0"/>
+                          </a:rPr>
+                        </m:ctrlPr>
+                      </m:dPr>
+                      <m:e>
+                        <m:r>
+                          <m:rPr>
+                            <m:sty m:val="p"/>
+                          </m:rPr>
+                          <a:rPr lang="en-US" altLang="ja-JP" sz="2400" b="0" i="0" smtClean="0">
+                            <a:latin typeface="Cambria Math" panose="02040503050406030204" pitchFamily="18" charset="0"/>
+                          </a:rPr>
+                          <m:t>C</m:t>
+                        </m:r>
+                      </m:e>
+                    </m:d>
+                    <m:r>
+                      <a:rPr lang="en-US" altLang="ja-JP" sz="2400" b="0" i="0" smtClean="0">
+                        <a:latin typeface="Cambria Math" panose="02040503050406030204" pitchFamily="18" charset="0"/>
+                      </a:rPr>
+                      <m:t>|</m:t>
+                    </m:r>
+                    <m:r>
+                      <a:rPr lang="en-US" altLang="ja-JP" sz="2400" i="0">
+                        <a:latin typeface="Cambria Math" panose="02040503050406030204" pitchFamily="18" charset="0"/>
+                      </a:rPr>
+                      <m:t>×</m:t>
+                    </m:r>
+                    <m:r>
+                      <a:rPr lang="en-US" altLang="ja-JP" sz="2400" b="0" i="0" smtClean="0">
+                        <a:latin typeface="Cambria Math" panose="02040503050406030204" pitchFamily="18" charset="0"/>
+                      </a:rPr>
+                      <m:t>|</m:t>
+                    </m:r>
+                    <m:d>
+                      <m:dPr>
+                        <m:begChr m:val="|"/>
+                        <m:endChr m:val="|"/>
+                        <m:ctrlPr>
+                          <a:rPr lang="en-US" altLang="ja-JP" sz="2400" b="0" smtClean="0">
+                            <a:latin typeface="Cambria Math" panose="02040503050406030204" pitchFamily="18" charset="0"/>
+                          </a:rPr>
+                        </m:ctrlPr>
+                      </m:dPr>
+                      <m:e>
+                        <m:r>
+                          <m:rPr>
+                            <m:sty m:val="p"/>
+                          </m:rPr>
+                          <a:rPr lang="en-US" altLang="ja-JP" sz="2400" b="0" i="0" smtClean="0">
+                            <a:latin typeface="Cambria Math" panose="02040503050406030204" pitchFamily="18" charset="0"/>
+                          </a:rPr>
+                          <m:t>B</m:t>
+                        </m:r>
+                      </m:e>
+                    </m:d>
+                    <m:r>
+                      <a:rPr lang="en-US" altLang="ja-JP" sz="2400" b="0" i="0" smtClean="0">
+                        <a:latin typeface="Cambria Math" panose="02040503050406030204" pitchFamily="18" charset="0"/>
+                      </a:rPr>
+                      <m:t>|</m:t>
+                    </m:r>
+                    <m:r>
+                      <a:rPr lang="en-US" altLang="ja-JP" sz="2400" i="0">
+                        <a:latin typeface="Cambria Math" panose="02040503050406030204" pitchFamily="18" charset="0"/>
+                      </a:rPr>
+                      <m:t>×</m:t>
+                    </m:r>
+                    <m:func>
+                      <m:funcPr>
+                        <m:ctrlPr>
+                          <a:rPr lang="en-US" altLang="ja-JP" sz="2400" b="0" smtClean="0">
+                            <a:latin typeface="Cambria Math" panose="02040503050406030204" pitchFamily="18" charset="0"/>
+                          </a:rPr>
+                        </m:ctrlPr>
+                      </m:funcPr>
+                      <m:fName>
+                        <m:r>
+                          <m:rPr>
+                            <m:sty m:val="p"/>
+                          </m:rPr>
+                          <a:rPr lang="en-US" altLang="ja-JP" sz="2400" b="0" i="0" smtClean="0">
+                            <a:latin typeface="Cambria Math" panose="02040503050406030204" pitchFamily="18" charset="0"/>
+                          </a:rPr>
+                          <m:t>cos</m:t>
+                        </m:r>
+                      </m:fName>
+                      <m:e>
+                        <m:d>
+                          <m:dPr>
+                            <m:ctrlPr>
+                              <a:rPr lang="en-US" altLang="ja-JP" sz="2400" b="0" smtClean="0">
+                                <a:latin typeface="Cambria Math" panose="02040503050406030204" pitchFamily="18" charset="0"/>
+                              </a:rPr>
+                            </m:ctrlPr>
+                          </m:dPr>
+                          <m:e>
+                            <m:r>
+                              <a:rPr lang="ja-JP" altLang="en-US" sz="2400" i="0">
+                                <a:latin typeface="Cambria Math" panose="02040503050406030204" pitchFamily="18" charset="0"/>
+                              </a:rPr>
+                              <m:t>視野角</m:t>
+                            </m:r>
+                            <m:r>
+                              <a:rPr lang="en-US" altLang="ja-JP" sz="2400" i="0" smtClean="0">
+                                <a:latin typeface="Cambria Math" panose="02040503050406030204" pitchFamily="18" charset="0"/>
+                              </a:rPr>
+                              <m:t>÷</m:t>
+                            </m:r>
+                            <m:r>
+                              <a:rPr lang="en-US" altLang="ja-JP" sz="2400" b="0" i="0" smtClean="0">
+                                <a:latin typeface="Cambria Math" panose="02040503050406030204" pitchFamily="18" charset="0"/>
+                              </a:rPr>
+                              <m:t>2</m:t>
+                            </m:r>
+                          </m:e>
+                        </m:d>
+                      </m:e>
+                    </m:func>
+                  </m:oMath>
+                </a14:m>
+                <a:r>
+                  <a:rPr lang="en-US" altLang="ja-JP" sz="2400" dirty="0"/>
+                  <a:t> </a:t>
+                </a:r>
+              </a:p>
+              <a:p>
+                <a:r>
+                  <a:rPr lang="ja-JP" altLang="en-US" sz="2400" dirty="0"/>
+                  <a:t>各ベクトルの長さは１なので、</a:t>
+                </a:r>
+                <a:endParaRPr lang="en-US" altLang="ja-JP" sz="2400" dirty="0"/>
+              </a:p>
+              <a:p>
+                <a14:m>
+                  <m:oMath xmlns:m="http://schemas.openxmlformats.org/officeDocument/2006/math">
+                    <m:r>
+                      <a:rPr lang="en-US" altLang="ja-JP" sz="2400" b="0" i="0" smtClean="0">
+                        <a:latin typeface="Cambria Math" panose="02040503050406030204" pitchFamily="18" charset="0"/>
+                      </a:rPr>
+                      <m:t>1</m:t>
+                    </m:r>
+                    <m:r>
+                      <a:rPr lang="en-US" altLang="ja-JP" sz="2400" i="0">
+                        <a:latin typeface="Cambria Math" panose="02040503050406030204" pitchFamily="18" charset="0"/>
+                      </a:rPr>
+                      <m:t>×</m:t>
+                    </m:r>
+                    <m:r>
+                      <a:rPr lang="en-US" altLang="ja-JP" sz="2400" b="0" i="0" smtClean="0">
+                        <a:latin typeface="Cambria Math" panose="02040503050406030204" pitchFamily="18" charset="0"/>
+                      </a:rPr>
+                      <m:t>1</m:t>
+                    </m:r>
+                    <m:r>
+                      <a:rPr lang="en-US" altLang="ja-JP" sz="2400" i="0">
+                        <a:latin typeface="Cambria Math" panose="02040503050406030204" pitchFamily="18" charset="0"/>
+                      </a:rPr>
+                      <m:t>×</m:t>
+                    </m:r>
+                    <m:func>
+                      <m:funcPr>
+                        <m:ctrlPr>
+                          <a:rPr lang="en-US" altLang="ja-JP" sz="2400" b="0" smtClean="0">
+                            <a:latin typeface="Cambria Math" panose="02040503050406030204" pitchFamily="18" charset="0"/>
+                          </a:rPr>
+                        </m:ctrlPr>
+                      </m:funcPr>
+                      <m:fName>
+                        <m:r>
+                          <m:rPr>
+                            <m:sty m:val="p"/>
+                          </m:rPr>
+                          <a:rPr lang="en-US" altLang="ja-JP" sz="2400" b="0" i="0" smtClean="0">
+                            <a:latin typeface="Cambria Math" panose="02040503050406030204" pitchFamily="18" charset="0"/>
+                          </a:rPr>
+                          <m:t>cos</m:t>
+                        </m:r>
+                      </m:fName>
+                      <m:e>
+                        <m:d>
+                          <m:dPr>
+                            <m:ctrlPr>
+                              <a:rPr lang="en-US" altLang="ja-JP" sz="2400" b="0" smtClean="0">
+                                <a:latin typeface="Cambria Math" panose="02040503050406030204" pitchFamily="18" charset="0"/>
+                              </a:rPr>
+                            </m:ctrlPr>
+                          </m:dPr>
+                          <m:e>
+                            <m:r>
+                              <a:rPr lang="ja-JP" altLang="en-US" sz="2400" i="0">
+                                <a:latin typeface="Cambria Math" panose="02040503050406030204" pitchFamily="18" charset="0"/>
+                              </a:rPr>
+                              <m:t>視野角</m:t>
+                            </m:r>
+                            <m:r>
+                              <a:rPr lang="en-US" altLang="ja-JP" sz="2400" i="0" smtClean="0">
+                                <a:latin typeface="Cambria Math" panose="02040503050406030204" pitchFamily="18" charset="0"/>
+                              </a:rPr>
+                              <m:t>÷</m:t>
+                            </m:r>
+                            <m:r>
+                              <a:rPr lang="en-US" altLang="ja-JP" sz="2400" b="0" i="0" smtClean="0">
+                                <a:latin typeface="Cambria Math" panose="02040503050406030204" pitchFamily="18" charset="0"/>
+                              </a:rPr>
+                              <m:t>2</m:t>
+                            </m:r>
+                          </m:e>
+                        </m:d>
+                      </m:e>
+                    </m:func>
+                    <m:r>
+                      <a:rPr lang="en-US" altLang="ja-JP" sz="2400" b="0" i="0" smtClean="0">
+                        <a:latin typeface="Cambria Math" panose="02040503050406030204" pitchFamily="18" charset="0"/>
+                      </a:rPr>
+                      <m:t>=</m:t>
+                    </m:r>
+                    <m:func>
+                      <m:funcPr>
+                        <m:ctrlPr>
+                          <a:rPr lang="en-US" altLang="ja-JP" sz="2400" b="1" smtClean="0">
+                            <a:solidFill>
+                              <a:srgbClr val="FF0000"/>
+                            </a:solidFill>
+                            <a:latin typeface="Cambria Math" panose="02040503050406030204" pitchFamily="18" charset="0"/>
+                          </a:rPr>
+                        </m:ctrlPr>
+                      </m:funcPr>
+                      <m:fName>
+                        <m:r>
+                          <a:rPr lang="en-US" altLang="ja-JP" sz="2400" b="1" i="0">
+                            <a:solidFill>
+                              <a:srgbClr val="FF0000"/>
+                            </a:solidFill>
+                            <a:latin typeface="Cambria Math" panose="02040503050406030204" pitchFamily="18" charset="0"/>
+                          </a:rPr>
+                          <m:t>𝐜𝐨𝐬</m:t>
+                        </m:r>
+                      </m:fName>
+                      <m:e>
+                        <m:d>
+                          <m:dPr>
+                            <m:ctrlPr>
+                              <a:rPr lang="en-US" altLang="ja-JP" sz="2400" b="1">
+                                <a:solidFill>
+                                  <a:srgbClr val="FF0000"/>
+                                </a:solidFill>
+                                <a:latin typeface="Cambria Math" panose="02040503050406030204" pitchFamily="18" charset="0"/>
+                              </a:rPr>
+                            </m:ctrlPr>
+                          </m:dPr>
+                          <m:e>
+                            <m:r>
+                              <a:rPr lang="ja-JP" altLang="en-US" sz="2400" b="1" i="0">
+                                <a:solidFill>
+                                  <a:srgbClr val="FF0000"/>
+                                </a:solidFill>
+                                <a:latin typeface="Cambria Math" panose="02040503050406030204" pitchFamily="18" charset="0"/>
+                              </a:rPr>
+                              <m:t>視野角</m:t>
+                            </m:r>
+                            <m:r>
+                              <a:rPr lang="en-US" altLang="ja-JP" sz="2400" b="1" i="0">
+                                <a:solidFill>
+                                  <a:srgbClr val="FF0000"/>
+                                </a:solidFill>
+                                <a:latin typeface="Cambria Math" panose="02040503050406030204" pitchFamily="18" charset="0"/>
+                              </a:rPr>
+                              <m:t>÷</m:t>
+                            </m:r>
+                            <m:r>
+                              <a:rPr lang="en-US" altLang="ja-JP" sz="2400" b="1" i="0">
+                                <a:solidFill>
+                                  <a:srgbClr val="FF0000"/>
+                                </a:solidFill>
+                                <a:latin typeface="Cambria Math" panose="02040503050406030204" pitchFamily="18" charset="0"/>
+                              </a:rPr>
+                              <m:t>𝟐</m:t>
+                            </m:r>
+                          </m:e>
+                        </m:d>
+                      </m:e>
+                    </m:func>
+                  </m:oMath>
+                </a14:m>
+                <a:r>
+                  <a:rPr lang="en-US" altLang="ja-JP" sz="2400" b="1" dirty="0">
+                    <a:solidFill>
+                      <a:srgbClr val="FF0000"/>
+                    </a:solidFill>
+                  </a:rPr>
+                  <a:t> </a:t>
+                </a:r>
+              </a:p>
+              <a:p>
+                <a:endParaRPr lang="en-US" altLang="ja-JP" sz="2400" b="1" dirty="0">
+                  <a:solidFill>
+                    <a:srgbClr val="FF0000"/>
+                  </a:solidFill>
+                </a:endParaRPr>
+              </a:p>
+              <a:p>
+                <a:r>
+                  <a:rPr lang="ja-JP" altLang="en-US" sz="2400" dirty="0"/>
+                  <a:t>実際にプログラムを組んでいきましょう。</a:t>
+                </a:r>
+                <a:endParaRPr lang="en-US" altLang="ja-JP" sz="2400" dirty="0"/>
+              </a:p>
+            </p:txBody>
+          </p:sp>
+        </mc:Choice>
+        <mc:Fallback>
+          <p:sp>
+            <p:nvSpPr>
+              <p:cNvPr id="6" name="テキスト ボックス 5">
+                <a:extLst>
+                  <a:ext uri="{FF2B5EF4-FFF2-40B4-BE49-F238E27FC236}">
+                    <a16:creationId xmlns:a16="http://schemas.microsoft.com/office/drawing/2014/main" id="{55830AD6-028B-4C4E-80BF-B70DFC1C3A46}"/>
+                  </a:ext>
+                </a:extLst>
+              </p:cNvPr>
+              <p:cNvSpPr txBox="1">
+                <a:spLocks noRot="1" noChangeAspect="1" noMove="1" noResize="1" noEditPoints="1" noAdjustHandles="1" noChangeArrowheads="1" noChangeShapeType="1" noTextEdit="1"/>
+              </p:cNvSpPr>
+              <p:nvPr/>
+            </p:nvSpPr>
+            <p:spPr>
+              <a:xfrm>
+                <a:off x="567542" y="1216429"/>
+                <a:ext cx="8685391" cy="3049809"/>
+              </a:xfrm>
+              <a:prstGeom prst="rect">
+                <a:avLst/>
+              </a:prstGeom>
+              <a:blipFill>
+                <a:blip r:embed="rId2"/>
+                <a:stretch>
+                  <a:fillRect l="-1053" t="-1600" r="-140" b="-3600"/>
+                </a:stretch>
+              </a:blipFill>
+            </p:spPr>
+            <p:txBody>
+              <a:bodyPr/>
+              <a:lstStyle/>
+              <a:p>
+                <a:r>
+                  <a:rPr lang="ja-JP" altLang="en-US">
+                    <a:noFill/>
+                  </a:rPr>
+                  <a:t> </a:t>
+                </a:r>
+              </a:p>
+            </p:txBody>
+          </p:sp>
+        </mc:Fallback>
+      </mc:AlternateContent>
+    </p:spTree>
+    <p:extLst>
+      <p:ext uri="{BB962C8B-B14F-4D97-AF65-F5344CB8AC3E}">
+        <p14:creationId xmlns:p14="http://schemas.microsoft.com/office/powerpoint/2010/main" val="3140803844"/>
+      </p:ext>
+    </p:extLst>
+  </p:cSld>
+  <p:clrMapOvr>
+    <a:masterClrMapping/>
+  </p:clrMapOvr>
+</p:sld>
+</file>
+
+<file path=ppt/slides/slide11.xml><?xml version="1.0" encoding="utf-8"?>
+<p:sld xmlns:a="http://schemas.openxmlformats.org/drawingml/2006/main" xmlns:r="http://schemas.openxmlformats.org/officeDocument/2006/relationships" xmlns:p="http://schemas.openxmlformats.org/presentationml/2006/main">
+  <p:cSld>
+    <p:spTree>
+      <p:nvGrpSpPr>
+        <p:cNvPr id="1" name=""/>
+        <p:cNvGrpSpPr/>
+        <p:nvPr/>
+      </p:nvGrpSpPr>
+      <p:grpSpPr>
+        <a:xfrm>
+          <a:off x="0" y="0"/>
+          <a:ext cx="0" cy="0"/>
+          <a:chOff x="0" y="0"/>
+          <a:chExt cx="0" cy="0"/>
+        </a:xfrm>
+      </p:grpSpPr>
+      <p:sp>
+        <p:nvSpPr>
+          <p:cNvPr id="4" name="テキスト ボックス 3">
+            <a:extLst>
+              <a:ext uri="{FF2B5EF4-FFF2-40B4-BE49-F238E27FC236}">
+                <a16:creationId xmlns:a16="http://schemas.microsoft.com/office/drawing/2014/main" id="{5A13BF46-B8C5-48AA-8308-C9ECFF431A18}"/>
+              </a:ext>
+            </a:extLst>
+          </p:cNvPr>
+          <p:cNvSpPr txBox="1"/>
+          <p:nvPr/>
+        </p:nvSpPr>
+        <p:spPr>
+          <a:xfrm>
+            <a:off x="567542" y="491954"/>
+            <a:ext cx="2236510" cy="584775"/>
+          </a:xfrm>
+          <a:prstGeom prst="rect">
+            <a:avLst/>
+          </a:prstGeom>
+          <a:noFill/>
+        </p:spPr>
+        <p:txBody>
+          <a:bodyPr wrap="none" rtlCol="0">
+            <a:spAutoFit/>
+          </a:bodyPr>
+          <a:lstStyle/>
+          <a:p>
+            <a:r>
+              <a:rPr kumimoji="1" lang="ja-JP" altLang="en-US" sz="3200" b="1" u="sng" dirty="0"/>
+              <a:t>視野角判定</a:t>
+            </a:r>
+          </a:p>
+        </p:txBody>
+      </p:sp>
+      <p:sp>
+        <p:nvSpPr>
+          <p:cNvPr id="6" name="テキスト ボックス 5">
+            <a:extLst>
+              <a:ext uri="{FF2B5EF4-FFF2-40B4-BE49-F238E27FC236}">
+                <a16:creationId xmlns:a16="http://schemas.microsoft.com/office/drawing/2014/main" id="{55830AD6-028B-4C4E-80BF-B70DFC1C3A46}"/>
+              </a:ext>
+            </a:extLst>
+          </p:cNvPr>
+          <p:cNvSpPr txBox="1"/>
+          <p:nvPr/>
+        </p:nvSpPr>
+        <p:spPr>
+          <a:xfrm>
+            <a:off x="567542" y="1216429"/>
+            <a:ext cx="7571303" cy="461665"/>
+          </a:xfrm>
+          <a:prstGeom prst="rect">
+            <a:avLst/>
+          </a:prstGeom>
+          <a:noFill/>
+        </p:spPr>
+        <p:txBody>
+          <a:bodyPr wrap="none" rtlCol="0">
+            <a:spAutoFit/>
+          </a:bodyPr>
+          <a:lstStyle/>
+          <a:p>
+            <a:r>
+              <a:rPr lang="ja-JP" altLang="en-US" sz="2400" dirty="0"/>
+              <a:t>これらを踏まえて残りの空欄を埋めていきましょう。</a:t>
+            </a:r>
+            <a:endParaRPr lang="en-US" altLang="ja-JP" sz="2400" dirty="0"/>
+          </a:p>
+        </p:txBody>
+      </p:sp>
+      <p:pic>
+        <p:nvPicPr>
+          <p:cNvPr id="9" name="図 8">
+            <a:extLst>
+              <a:ext uri="{FF2B5EF4-FFF2-40B4-BE49-F238E27FC236}">
+                <a16:creationId xmlns:a16="http://schemas.microsoft.com/office/drawing/2014/main" id="{8505E226-22CF-4DDC-ADD4-9AD92C22993E}"/>
+              </a:ext>
+            </a:extLst>
+          </p:cNvPr>
+          <p:cNvPicPr>
+            <a:picLocks noChangeAspect="1"/>
+          </p:cNvPicPr>
+          <p:nvPr/>
+        </p:nvPicPr>
+        <p:blipFill>
+          <a:blip r:embed="rId2"/>
+          <a:stretch>
+            <a:fillRect/>
+          </a:stretch>
+        </p:blipFill>
+        <p:spPr>
+          <a:xfrm>
+            <a:off x="567542" y="1817794"/>
+            <a:ext cx="8422316" cy="4548252"/>
+          </a:xfrm>
+          <a:prstGeom prst="rect">
+            <a:avLst/>
+          </a:prstGeom>
+        </p:spPr>
+      </p:pic>
+      <p:sp>
+        <p:nvSpPr>
+          <p:cNvPr id="19" name="テキスト ボックス 18">
+            <a:extLst>
+              <a:ext uri="{FF2B5EF4-FFF2-40B4-BE49-F238E27FC236}">
+                <a16:creationId xmlns:a16="http://schemas.microsoft.com/office/drawing/2014/main" id="{5C21371C-FCC2-4268-923B-C484D8BFC512}"/>
+              </a:ext>
+            </a:extLst>
+          </p:cNvPr>
+          <p:cNvSpPr txBox="1"/>
+          <p:nvPr/>
+        </p:nvSpPr>
+        <p:spPr>
+          <a:xfrm>
+            <a:off x="5639076" y="5263496"/>
+            <a:ext cx="5514651" cy="1015663"/>
+          </a:xfrm>
+          <a:prstGeom prst="rect">
+            <a:avLst/>
+          </a:prstGeom>
+          <a:noFill/>
+          <a:ln>
+            <a:solidFill>
+              <a:schemeClr val="tx1"/>
+            </a:solidFill>
+          </a:ln>
+        </p:spPr>
+        <p:txBody>
+          <a:bodyPr wrap="none" rtlCol="0">
+            <a:spAutoFit/>
+          </a:bodyPr>
+          <a:lstStyle/>
+          <a:p>
+            <a:r>
+              <a:rPr lang="ja-JP" altLang="en-US" sz="2000" b="1" dirty="0"/>
+              <a:t>用意してある変数・定数</a:t>
+            </a:r>
+            <a:endParaRPr lang="en-US" altLang="ja-JP" sz="2000" b="1" dirty="0"/>
+          </a:p>
+          <a:p>
+            <a:r>
+              <a:rPr lang="en-US" altLang="ja-JP" sz="2000" dirty="0" err="1">
+                <a:solidFill>
+                  <a:srgbClr val="0070C0"/>
+                </a:solidFill>
+              </a:rPr>
+              <a:t>g_SightMachineData.dir</a:t>
+            </a:r>
+            <a:r>
+              <a:rPr lang="ja-JP" altLang="en-US" sz="2000" dirty="0"/>
+              <a:t>：敵の向きベクトル</a:t>
+            </a:r>
+            <a:endParaRPr lang="en-US" altLang="ja-JP" sz="2000" dirty="0"/>
+          </a:p>
+          <a:p>
+            <a:r>
+              <a:rPr lang="en-US" altLang="ja-JP" sz="2000" dirty="0">
+                <a:solidFill>
+                  <a:srgbClr val="7030A0"/>
+                </a:solidFill>
+              </a:rPr>
+              <a:t>SIGHT_MACHINE_VIEWING_ANGLE</a:t>
+            </a:r>
+            <a:r>
+              <a:rPr lang="ja-JP" altLang="en-US" sz="2000" dirty="0"/>
+              <a:t>：視野角</a:t>
+            </a:r>
+            <a:endParaRPr lang="en-US" altLang="ja-JP" sz="2000" dirty="0"/>
+          </a:p>
+        </p:txBody>
+      </p:sp>
+    </p:spTree>
+    <p:extLst>
+      <p:ext uri="{BB962C8B-B14F-4D97-AF65-F5344CB8AC3E}">
+        <p14:creationId xmlns:p14="http://schemas.microsoft.com/office/powerpoint/2010/main" val="4096461734"/>
+      </p:ext>
+    </p:extLst>
+  </p:cSld>
+  <p:clrMapOvr>
+    <a:masterClrMapping/>
+  </p:clrMapOvr>
+</p:sld>
+</file>
+
+<file path=ppt/slides/slide12.xml><?xml version="1.0" encoding="utf-8"?>
+<p:sld xmlns:a="http://schemas.openxmlformats.org/drawingml/2006/main" xmlns:r="http://schemas.openxmlformats.org/officeDocument/2006/relationships" xmlns:p="http://schemas.openxmlformats.org/presentationml/2006/main">
+  <p:cSld>
+    <p:spTree>
+      <p:nvGrpSpPr>
+        <p:cNvPr id="1" name=""/>
+        <p:cNvGrpSpPr/>
+        <p:nvPr/>
+      </p:nvGrpSpPr>
+      <p:grpSpPr>
+        <a:xfrm>
+          <a:off x="0" y="0"/>
+          <a:ext cx="0" cy="0"/>
+          <a:chOff x="0" y="0"/>
+          <a:chExt cx="0" cy="0"/>
+        </a:xfrm>
+      </p:grpSpPr>
+      <p:sp>
+        <p:nvSpPr>
+          <p:cNvPr id="4" name="テキスト ボックス 3">
+            <a:extLst>
+              <a:ext uri="{FF2B5EF4-FFF2-40B4-BE49-F238E27FC236}">
+                <a16:creationId xmlns:a16="http://schemas.microsoft.com/office/drawing/2014/main" id="{5A13BF46-B8C5-48AA-8308-C9ECFF431A18}"/>
+              </a:ext>
+            </a:extLst>
+          </p:cNvPr>
+          <p:cNvSpPr txBox="1"/>
+          <p:nvPr/>
+        </p:nvSpPr>
+        <p:spPr>
+          <a:xfrm>
+            <a:off x="567542" y="491954"/>
+            <a:ext cx="2236510" cy="584775"/>
+          </a:xfrm>
+          <a:prstGeom prst="rect">
+            <a:avLst/>
+          </a:prstGeom>
+          <a:noFill/>
+        </p:spPr>
+        <p:txBody>
+          <a:bodyPr wrap="none" rtlCol="0">
+            <a:spAutoFit/>
+          </a:bodyPr>
+          <a:lstStyle/>
+          <a:p>
+            <a:r>
+              <a:rPr kumimoji="1" lang="ja-JP" altLang="en-US" sz="3200" b="1" u="sng" dirty="0"/>
+              <a:t>視野角判定</a:t>
+            </a:r>
+          </a:p>
+        </p:txBody>
+      </p:sp>
+      <p:sp>
+        <p:nvSpPr>
+          <p:cNvPr id="6" name="テキスト ボックス 5">
+            <a:extLst>
+              <a:ext uri="{FF2B5EF4-FFF2-40B4-BE49-F238E27FC236}">
+                <a16:creationId xmlns:a16="http://schemas.microsoft.com/office/drawing/2014/main" id="{55830AD6-028B-4C4E-80BF-B70DFC1C3A46}"/>
+              </a:ext>
+            </a:extLst>
+          </p:cNvPr>
+          <p:cNvSpPr txBox="1"/>
+          <p:nvPr/>
+        </p:nvSpPr>
+        <p:spPr>
+          <a:xfrm>
+            <a:off x="567542" y="1216429"/>
+            <a:ext cx="11264622" cy="830997"/>
+          </a:xfrm>
+          <a:prstGeom prst="rect">
+            <a:avLst/>
+          </a:prstGeom>
+          <a:noFill/>
+        </p:spPr>
+        <p:txBody>
+          <a:bodyPr wrap="none" rtlCol="0">
+            <a:spAutoFit/>
+          </a:bodyPr>
+          <a:lstStyle/>
+          <a:p>
+            <a:r>
+              <a:rPr kumimoji="1" lang="ja-JP" altLang="en-US" sz="2400" dirty="0"/>
+              <a:t>正しくできていればサンプル通りにプレイヤーの左上の座標が視野角に入れば、</a:t>
+            </a:r>
+            <a:endParaRPr kumimoji="1" lang="en-US" altLang="ja-JP" sz="2400" dirty="0"/>
+          </a:p>
+          <a:p>
+            <a:r>
+              <a:rPr kumimoji="1" lang="ja-JP" altLang="en-US" sz="2400" dirty="0"/>
+              <a:t>プレイヤーを追従するようになります。</a:t>
+            </a:r>
+            <a:endParaRPr kumimoji="1" lang="en-US" altLang="ja-JP" sz="2400" dirty="0"/>
+          </a:p>
+        </p:txBody>
+      </p:sp>
+      <p:pic>
+        <p:nvPicPr>
+          <p:cNvPr id="5" name="図 4">
+            <a:extLst>
+              <a:ext uri="{FF2B5EF4-FFF2-40B4-BE49-F238E27FC236}">
+                <a16:creationId xmlns:a16="http://schemas.microsoft.com/office/drawing/2014/main" id="{D43D27BC-A265-488C-9B55-48EFBD811579}"/>
+              </a:ext>
+            </a:extLst>
+          </p:cNvPr>
+          <p:cNvPicPr>
+            <a:picLocks noChangeAspect="1"/>
+          </p:cNvPicPr>
+          <p:nvPr/>
+        </p:nvPicPr>
+        <p:blipFill>
+          <a:blip r:embed="rId2"/>
+          <a:stretch>
+            <a:fillRect/>
+          </a:stretch>
+        </p:blipFill>
+        <p:spPr>
+          <a:xfrm>
+            <a:off x="567542" y="2187126"/>
+            <a:ext cx="6151959" cy="4178920"/>
+          </a:xfrm>
+          <a:prstGeom prst="rect">
+            <a:avLst/>
+          </a:prstGeom>
+        </p:spPr>
+      </p:pic>
+    </p:spTree>
+    <p:extLst>
+      <p:ext uri="{BB962C8B-B14F-4D97-AF65-F5344CB8AC3E}">
+        <p14:creationId xmlns:p14="http://schemas.microsoft.com/office/powerpoint/2010/main" val="3411085523"/>
       </p:ext>
     </p:extLst>
   </p:cSld>
@@ -3847,7 +4649,7 @@
         <p:spPr>
           <a:xfrm>
             <a:off x="567542" y="491954"/>
-            <a:ext cx="2504212" cy="584775"/>
+            <a:ext cx="2236510" cy="584775"/>
           </a:xfrm>
           <a:prstGeom prst="rect">
             <a:avLst/>
@@ -3861,12 +4663,8 @@
           <a:lstStyle/>
           <a:p>
             <a:r>
-              <a:rPr kumimoji="1" lang="en-US" altLang="ja-JP" sz="3200" b="1" u="sng" dirty="0"/>
-              <a:t>DirectX</a:t>
-            </a:r>
-            <a:r>
               <a:rPr kumimoji="1" lang="ja-JP" altLang="en-US" sz="3200" b="1" u="sng" dirty="0"/>
-              <a:t>とは</a:t>
+              <a:t>視野角判定</a:t>
             </a:r>
           </a:p>
         </p:txBody>
@@ -3886,7 +4684,7 @@
         <p:spPr>
           <a:xfrm>
             <a:off x="567542" y="1216429"/>
-            <a:ext cx="9554219" cy="4524315"/>
+            <a:ext cx="6893234" cy="461665"/>
           </a:xfrm>
           <a:prstGeom prst="rect">
             <a:avLst/>
@@ -3900,114 +4698,55 @@
           <a:lstStyle/>
           <a:p>
             <a:r>
-              <a:rPr kumimoji="1" lang="en-US" altLang="ja-JP" sz="2400" dirty="0"/>
-              <a:t>PC</a:t>
+              <a:rPr kumimoji="1" lang="en-US" altLang="ja-JP" sz="2400" b="1" dirty="0">
+                <a:solidFill>
+                  <a:srgbClr val="FF0000"/>
+                </a:solidFill>
+              </a:rPr>
+              <a:t>SightMachine.cpp</a:t>
             </a:r>
             <a:r>
               <a:rPr kumimoji="1" lang="ja-JP" altLang="en-US" sz="2400" dirty="0"/>
-              <a:t>ゲームを制作するためには</a:t>
-            </a:r>
-            <a:r>
-              <a:rPr kumimoji="1" lang="en-US" altLang="ja-JP" sz="2400" dirty="0"/>
-              <a:t>DirectX</a:t>
-            </a:r>
-            <a:r>
-              <a:rPr kumimoji="1" lang="ja-JP" altLang="en-US" sz="2400" dirty="0"/>
-              <a:t>を使わなければいけません。</a:t>
+              <a:t>の空欄を埋めて実装します。</a:t>
             </a:r>
             <a:endParaRPr kumimoji="1" lang="en-US" altLang="ja-JP" sz="2400" dirty="0"/>
           </a:p>
-          <a:p>
-            <a:endParaRPr lang="en-US" altLang="ja-JP" sz="2400" dirty="0"/>
-          </a:p>
-          <a:p>
-            <a:r>
-              <a:rPr kumimoji="1" lang="ja-JP" altLang="en-US" sz="2400" dirty="0"/>
-              <a:t>ただし、</a:t>
-            </a:r>
-            <a:r>
-              <a:rPr kumimoji="1" lang="en-US" altLang="ja-JP" sz="2400" dirty="0"/>
-              <a:t>DirectX</a:t>
-            </a:r>
-            <a:r>
-              <a:rPr kumimoji="1" lang="ja-JP" altLang="en-US" sz="2400" dirty="0"/>
-              <a:t>はハードウェアにまつわるあらゆる機能の設定や、</a:t>
-            </a:r>
-            <a:endParaRPr lang="en-US" altLang="ja-JP" sz="2400" dirty="0"/>
-          </a:p>
-          <a:p>
-            <a:r>
-              <a:rPr kumimoji="1" lang="en-US" altLang="ja-JP" sz="2400" dirty="0"/>
-              <a:t>2D</a:t>
-            </a:r>
-            <a:r>
-              <a:rPr kumimoji="1" lang="ja-JP" altLang="en-US" sz="2400" dirty="0"/>
-              <a:t>、</a:t>
-            </a:r>
-            <a:r>
-              <a:rPr kumimoji="1" lang="en-US" altLang="ja-JP" sz="2400" dirty="0"/>
-              <a:t>3D</a:t>
-            </a:r>
-            <a:r>
-              <a:rPr kumimoji="1" lang="ja-JP" altLang="en-US" sz="2400" dirty="0"/>
-              <a:t>画像の読み込み、解析など、</a:t>
-            </a:r>
-            <a:endParaRPr kumimoji="1" lang="en-US" altLang="ja-JP" sz="2400" dirty="0"/>
-          </a:p>
-          <a:p>
-            <a:r>
-              <a:rPr lang="ja-JP" altLang="en-US" sz="2400" dirty="0"/>
-              <a:t>あらゆるものを、詳細に理解して使いこなさなければいけません。</a:t>
-            </a:r>
-            <a:endParaRPr lang="en-US" altLang="ja-JP" sz="2400" dirty="0"/>
-          </a:p>
-          <a:p>
-            <a:endParaRPr kumimoji="1" lang="en-US" altLang="ja-JP" sz="2400" dirty="0"/>
-          </a:p>
-          <a:p>
-            <a:r>
-              <a:rPr lang="ja-JP" altLang="en-US" sz="2400" dirty="0"/>
-              <a:t>そのため、</a:t>
-            </a:r>
-            <a:endParaRPr kumimoji="1" lang="en-US" altLang="ja-JP" sz="2400" dirty="0"/>
-          </a:p>
-          <a:p>
-            <a:r>
-              <a:rPr kumimoji="1" lang="ja-JP" altLang="en-US" sz="2400" dirty="0"/>
-              <a:t>１枚の画像を表示するだけでも非常に手間と時間がかかります。</a:t>
-            </a:r>
-            <a:endParaRPr kumimoji="1" lang="en-US" altLang="ja-JP" sz="2400" dirty="0"/>
-          </a:p>
-          <a:p>
-            <a:endParaRPr lang="en-US" altLang="ja-JP" sz="2400" dirty="0"/>
-          </a:p>
-          <a:p>
-            <a:r>
-              <a:rPr lang="ja-JP" altLang="en-US" sz="2400" dirty="0"/>
-              <a:t>■補足</a:t>
-            </a:r>
-            <a:endParaRPr lang="en-US" altLang="ja-JP" sz="2400" dirty="0"/>
-          </a:p>
-          <a:p>
-            <a:r>
-              <a:rPr kumimoji="1" lang="ja-JP" altLang="en-US" sz="2400" dirty="0"/>
-              <a:t>その分、自分好みのカスタマイズができるので、</a:t>
-            </a:r>
-            <a:endParaRPr kumimoji="1" lang="en-US" altLang="ja-JP" sz="2400" dirty="0"/>
-          </a:p>
-          <a:p>
-            <a:r>
-              <a:rPr lang="ja-JP" altLang="en-US" sz="2400" dirty="0"/>
-              <a:t>ゲームに合った動作環境を構築することはできます。</a:t>
-            </a:r>
-            <a:endParaRPr kumimoji="1" lang="en-US" altLang="ja-JP" sz="2400" dirty="0"/>
-          </a:p>
-        </p:txBody>
-      </p:sp>
+        </p:txBody>
+      </p:sp>
+      <p:pic>
+        <p:nvPicPr>
+          <p:cNvPr id="5" name="図 4">
+            <a:extLst>
+              <a:ext uri="{FF2B5EF4-FFF2-40B4-BE49-F238E27FC236}">
+                <a16:creationId xmlns:a16="http://schemas.microsoft.com/office/drawing/2014/main" id="{74916BF3-3DFA-4C81-8F92-16F69A27DF7F}"/>
+              </a:ext>
+            </a:extLst>
+          </p:cNvPr>
+          <p:cNvPicPr>
+            <a:picLocks noChangeAspect="1"/>
+          </p:cNvPicPr>
+          <p:nvPr/>
+        </p:nvPicPr>
+        <p:blipFill>
+          <a:blip r:embed="rId2"/>
+          <a:stretch>
+            <a:fillRect/>
+          </a:stretch>
+        </p:blipFill>
+        <p:spPr>
+          <a:xfrm>
+            <a:off x="567542" y="1817794"/>
+            <a:ext cx="6806925" cy="4501480"/>
+          </a:xfrm>
+          <a:prstGeom prst="rect">
+            <a:avLst/>
+          </a:prstGeom>
+        </p:spPr>
+      </p:pic>
     </p:spTree>
     <p:extLst>
       <p:ext uri="{BB962C8B-B14F-4D97-AF65-F5344CB8AC3E}">
-        <p14:creationId xmlns:p14="http://schemas.microsoft.com/office/powerpoint/2010/main" val="4122932895"/>
+        <p14:creationId xmlns:p14="http://schemas.microsoft.com/office/powerpoint/2010/main" val="1158001304"/>
       </p:ext>
     </p:extLst>
   </p:cSld>
@@ -4049,7 +4788,7 @@
         <p:spPr>
           <a:xfrm>
             <a:off x="567542" y="491954"/>
-            <a:ext cx="2504212" cy="584775"/>
+            <a:ext cx="2236510" cy="584775"/>
           </a:xfrm>
           <a:prstGeom prst="rect">
             <a:avLst/>
@@ -4063,12 +4802,8 @@
           <a:lstStyle/>
           <a:p>
             <a:r>
-              <a:rPr kumimoji="1" lang="en-US" altLang="ja-JP" sz="3200" b="1" u="sng" dirty="0"/>
-              <a:t>DirectX</a:t>
-            </a:r>
-            <a:r>
               <a:rPr kumimoji="1" lang="ja-JP" altLang="en-US" sz="3200" b="1" u="sng" dirty="0"/>
-              <a:t>とは</a:t>
+              <a:t>視野角判定</a:t>
             </a:r>
           </a:p>
         </p:txBody>
@@ -4088,7 +4823,7 @@
         <p:spPr>
           <a:xfrm>
             <a:off x="567542" y="1216429"/>
-            <a:ext cx="11093101" cy="4154984"/>
+            <a:ext cx="7571303" cy="830997"/>
           </a:xfrm>
           <a:prstGeom prst="rect">
             <a:avLst/>
@@ -4102,122 +4837,136 @@
           <a:lstStyle/>
           <a:p>
             <a:r>
-              <a:rPr lang="en-US" altLang="ja-JP" sz="2400" dirty="0"/>
-              <a:t>DirectX</a:t>
-            </a:r>
-            <a:r>
-              <a:rPr lang="ja-JP" altLang="en-US" sz="2400" dirty="0"/>
-              <a:t>があまりにも難易度が高いため、</a:t>
-            </a:r>
-            <a:endParaRPr lang="en-US" altLang="ja-JP" sz="2400" dirty="0"/>
-          </a:p>
-          <a:p>
-            <a:r>
               <a:rPr kumimoji="1" lang="ja-JP" altLang="en-US" sz="2400" dirty="0"/>
-              <a:t>それを簡単にまとめて使いやすくしてくれたのが</a:t>
-            </a:r>
-            <a:r>
-              <a:rPr kumimoji="1" lang="en-US" altLang="ja-JP" sz="2400" b="1" dirty="0" err="1">
+              <a:t>まずは</a:t>
+            </a:r>
+            <a:r>
+              <a:rPr kumimoji="1" lang="ja-JP" altLang="en-US" sz="2400" b="1" dirty="0">
                 <a:solidFill>
                   <a:srgbClr val="FF0000"/>
                 </a:solidFill>
               </a:rPr>
-              <a:t>DxLib</a:t>
+              <a:t>遠すぎるものを判定しない</a:t>
             </a:r>
             <a:r>
               <a:rPr kumimoji="1" lang="ja-JP" altLang="en-US" sz="2400" dirty="0"/>
-              <a:t>になります。</a:t>
+              <a:t>ように、</a:t>
             </a:r>
             <a:endParaRPr kumimoji="1" lang="en-US" altLang="ja-JP" sz="2400" dirty="0"/>
           </a:p>
           <a:p>
-            <a:endParaRPr lang="en-US" altLang="ja-JP" sz="2400" dirty="0"/>
-          </a:p>
-          <a:p>
-            <a:r>
-              <a:rPr kumimoji="1" lang="en-US" altLang="ja-JP" sz="2400" dirty="0" err="1"/>
-              <a:t>DxLib</a:t>
-            </a:r>
             <a:r>
               <a:rPr kumimoji="1" lang="ja-JP" altLang="en-US" sz="2400" dirty="0"/>
-              <a:t>は</a:t>
-            </a:r>
+              <a:t>一定の距離に近づいているかどうか判定しましょう。</a:t>
+            </a:r>
+            <a:endParaRPr kumimoji="1" lang="en-US" altLang="ja-JP" sz="2400" dirty="0"/>
+          </a:p>
+        </p:txBody>
+      </p:sp>
+      <p:pic>
+        <p:nvPicPr>
+          <p:cNvPr id="9" name="図 8">
+            <a:extLst>
+              <a:ext uri="{FF2B5EF4-FFF2-40B4-BE49-F238E27FC236}">
+                <a16:creationId xmlns:a16="http://schemas.microsoft.com/office/drawing/2014/main" id="{D3CDF1AF-0A39-48BF-BF0C-4033E5C1DC8D}"/>
+              </a:ext>
+            </a:extLst>
+          </p:cNvPr>
+          <p:cNvPicPr>
+            <a:picLocks noChangeAspect="1"/>
+          </p:cNvPicPr>
+          <p:nvPr/>
+        </p:nvPicPr>
+        <p:blipFill>
+          <a:blip r:embed="rId2"/>
+          <a:stretch>
+            <a:fillRect/>
+          </a:stretch>
+        </p:blipFill>
+        <p:spPr>
+          <a:xfrm>
+            <a:off x="567542" y="2187125"/>
+            <a:ext cx="9775944" cy="2952141"/>
+          </a:xfrm>
+          <a:prstGeom prst="rect">
+            <a:avLst/>
+          </a:prstGeom>
+        </p:spPr>
+      </p:pic>
+      <p:sp>
+        <p:nvSpPr>
+          <p:cNvPr id="10" name="テキスト ボックス 9">
+            <a:extLst>
+              <a:ext uri="{FF2B5EF4-FFF2-40B4-BE49-F238E27FC236}">
+                <a16:creationId xmlns:a16="http://schemas.microsoft.com/office/drawing/2014/main" id="{29CB2850-4575-4236-966F-9E5F8D1F7A5B}"/>
+              </a:ext>
+            </a:extLst>
+          </p:cNvPr>
+          <p:cNvSpPr txBox="1"/>
+          <p:nvPr/>
+        </p:nvSpPr>
+        <p:spPr>
+          <a:xfrm>
+            <a:off x="567542" y="5278965"/>
+            <a:ext cx="9696885" cy="830997"/>
+          </a:xfrm>
+          <a:prstGeom prst="rect">
+            <a:avLst/>
+          </a:prstGeom>
+          <a:noFill/>
+        </p:spPr>
+        <p:txBody>
+          <a:bodyPr wrap="none" rtlCol="0">
+            <a:spAutoFit/>
+          </a:bodyPr>
+          <a:lstStyle/>
+          <a:p>
             <a:r>
               <a:rPr kumimoji="1" lang="en-US" altLang="ja-JP" sz="2400" dirty="0"/>
-              <a:t>DirectX</a:t>
+              <a:t>※</a:t>
+            </a:r>
+            <a:r>
+              <a:rPr kumimoji="1" lang="en-US" altLang="ja-JP" sz="2400" b="1" dirty="0" err="1">
+                <a:solidFill>
+                  <a:srgbClr val="0070C0"/>
+                </a:solidFill>
+              </a:rPr>
+              <a:t>targetPos</a:t>
             </a:r>
             <a:r>
               <a:rPr kumimoji="1" lang="ja-JP" altLang="en-US" sz="2400" dirty="0"/>
-              <a:t>の難しい部分を、</a:t>
+              <a:t>にはプレイヤーの座標が渡されています。</a:t>
             </a:r>
             <a:endParaRPr kumimoji="1" lang="en-US" altLang="ja-JP" sz="2400" dirty="0"/>
           </a:p>
           <a:p>
             <a:r>
-              <a:rPr kumimoji="1" lang="en-US" altLang="ja-JP" sz="2400" dirty="0"/>
-              <a:t>C</a:t>
-            </a:r>
-            <a:r>
-              <a:rPr kumimoji="1" lang="ja-JP" altLang="en-US" sz="2400" dirty="0"/>
-              <a:t>言語の関数を呼ぶだけで簡単に使用できるように作られています。</a:t>
-            </a:r>
-            <a:endParaRPr kumimoji="1" lang="en-US" altLang="ja-JP" sz="2400" dirty="0"/>
-          </a:p>
-          <a:p>
-            <a:endParaRPr lang="en-US" altLang="ja-JP" sz="2400" dirty="0"/>
-          </a:p>
-          <a:p>
-            <a:r>
-              <a:rPr kumimoji="1" lang="ja-JP" altLang="en-US" sz="2400" dirty="0"/>
-              <a:t>昨今、</a:t>
-            </a:r>
-            <a:r>
-              <a:rPr kumimoji="1" lang="en-US" altLang="ja-JP" sz="2400" dirty="0"/>
-              <a:t>Unity</a:t>
+              <a:rPr lang="en-US" altLang="ja-JP" sz="2400" dirty="0"/>
+              <a:t>※</a:t>
             </a:r>
             <a:r>
               <a:rPr lang="ja-JP" altLang="en-US" sz="2400" dirty="0"/>
-              <a:t>などのゲームエンジンも普及してきている中で、</a:t>
-            </a:r>
-            <a:endParaRPr lang="en-US" altLang="ja-JP" sz="2400" dirty="0"/>
-          </a:p>
-          <a:p>
-            <a:r>
-              <a:rPr kumimoji="1" lang="en-US" altLang="ja-JP" sz="2400" dirty="0"/>
-              <a:t>DirectX</a:t>
-            </a:r>
-            <a:r>
-              <a:rPr kumimoji="1" lang="ja-JP" altLang="en-US" sz="2400" dirty="0"/>
-              <a:t>の知識はゲーム業界もあまり必要としていないため、</a:t>
-            </a:r>
-            <a:endParaRPr kumimoji="1" lang="en-US" altLang="ja-JP" sz="2400" dirty="0"/>
-          </a:p>
-          <a:p>
+              <a:t>判定距離は</a:t>
+            </a:r>
+            <a:r>
+              <a:rPr lang="en-US" altLang="ja-JP" sz="2400" b="1" dirty="0">
+                <a:solidFill>
+                  <a:srgbClr val="7030A0"/>
+                </a:solidFill>
+              </a:rPr>
+              <a:t>SIGHT_MACHINE_FOV_RANGE</a:t>
+            </a:r>
             <a:r>
               <a:rPr lang="ja-JP" altLang="en-US" sz="2400" dirty="0"/>
-              <a:t>在学中は</a:t>
-            </a:r>
-            <a:r>
-              <a:rPr lang="en-US" altLang="ja-JP" sz="2400" dirty="0" err="1"/>
-              <a:t>DxLib</a:t>
+              <a:t>で</a:t>
+            </a:r>
+            <a:r>
+              <a:rPr lang="en-US" altLang="ja-JP" sz="2400" dirty="0"/>
+              <a:t>200</a:t>
             </a:r>
             <a:r>
               <a:rPr lang="ja-JP" altLang="en-US" sz="2400" dirty="0"/>
-              <a:t>でゲームを制作していきます。</a:t>
-            </a:r>
-            <a:endParaRPr lang="en-US" altLang="ja-JP" sz="2400" dirty="0"/>
-          </a:p>
-          <a:p>
-            <a:endParaRPr kumimoji="1" lang="en-US" altLang="ja-JP" sz="2400" dirty="0"/>
-          </a:p>
-          <a:p>
-            <a:r>
-              <a:rPr kumimoji="1" lang="en-US" altLang="ja-JP" sz="2400" dirty="0"/>
-              <a:t>DirectX</a:t>
-            </a:r>
-            <a:r>
-              <a:rPr kumimoji="1" lang="ja-JP" altLang="en-US" sz="2400" dirty="0"/>
-              <a:t>は無料で使用できるので、興味のある方はチャレンジしてみては。。。</a:t>
+              <a:t>としています。</a:t>
             </a:r>
             <a:endParaRPr kumimoji="1" lang="en-US" altLang="ja-JP" sz="2400" dirty="0"/>
           </a:p>
@@ -4226,7 +4975,3016 @@
     </p:spTree>
     <p:extLst>
       <p:ext uri="{BB962C8B-B14F-4D97-AF65-F5344CB8AC3E}">
-        <p14:creationId xmlns:p14="http://schemas.microsoft.com/office/powerpoint/2010/main" val="1086491531"/>
+        <p14:creationId xmlns:p14="http://schemas.microsoft.com/office/powerpoint/2010/main" val="1166650850"/>
+      </p:ext>
+    </p:extLst>
+  </p:cSld>
+  <p:clrMapOvr>
+    <a:masterClrMapping/>
+  </p:clrMapOvr>
+</p:sld>
+</file>
+
+<file path=ppt/slides/slide4.xml><?xml version="1.0" encoding="utf-8"?>
+<p:sld xmlns:a="http://schemas.openxmlformats.org/drawingml/2006/main" xmlns:r="http://schemas.openxmlformats.org/officeDocument/2006/relationships" xmlns:p="http://schemas.openxmlformats.org/presentationml/2006/main">
+  <p:cSld>
+    <p:spTree>
+      <p:nvGrpSpPr>
+        <p:cNvPr id="1" name=""/>
+        <p:cNvGrpSpPr/>
+        <p:nvPr/>
+      </p:nvGrpSpPr>
+      <p:grpSpPr>
+        <a:xfrm>
+          <a:off x="0" y="0"/>
+          <a:ext cx="0" cy="0"/>
+          <a:chOff x="0" y="0"/>
+          <a:chExt cx="0" cy="0"/>
+        </a:xfrm>
+      </p:grpSpPr>
+      <p:sp>
+        <p:nvSpPr>
+          <p:cNvPr id="4" name="テキスト ボックス 3">
+            <a:extLst>
+              <a:ext uri="{FF2B5EF4-FFF2-40B4-BE49-F238E27FC236}">
+                <a16:creationId xmlns:a16="http://schemas.microsoft.com/office/drawing/2014/main" id="{5A13BF46-B8C5-48AA-8308-C9ECFF431A18}"/>
+              </a:ext>
+            </a:extLst>
+          </p:cNvPr>
+          <p:cNvSpPr txBox="1"/>
+          <p:nvPr/>
+        </p:nvSpPr>
+        <p:spPr>
+          <a:xfrm>
+            <a:off x="567542" y="491954"/>
+            <a:ext cx="3584636" cy="584775"/>
+          </a:xfrm>
+          <a:prstGeom prst="rect">
+            <a:avLst/>
+          </a:prstGeom>
+          <a:noFill/>
+        </p:spPr>
+        <p:txBody>
+          <a:bodyPr wrap="none" rtlCol="0">
+            <a:spAutoFit/>
+          </a:bodyPr>
+          <a:lstStyle/>
+          <a:p>
+            <a:r>
+              <a:rPr kumimoji="1" lang="ja-JP" altLang="en-US" sz="3200" b="1" u="sng" dirty="0"/>
+              <a:t>視野角判定 仕組み</a:t>
+            </a:r>
+          </a:p>
+        </p:txBody>
+      </p:sp>
+      <p:sp>
+        <p:nvSpPr>
+          <p:cNvPr id="6" name="テキスト ボックス 5">
+            <a:extLst>
+              <a:ext uri="{FF2B5EF4-FFF2-40B4-BE49-F238E27FC236}">
+                <a16:creationId xmlns:a16="http://schemas.microsoft.com/office/drawing/2014/main" id="{55830AD6-028B-4C4E-80BF-B70DFC1C3A46}"/>
+              </a:ext>
+            </a:extLst>
+          </p:cNvPr>
+          <p:cNvSpPr txBox="1"/>
+          <p:nvPr/>
+        </p:nvSpPr>
+        <p:spPr>
+          <a:xfrm>
+            <a:off x="567542" y="1216429"/>
+            <a:ext cx="7263527" cy="461665"/>
+          </a:xfrm>
+          <a:prstGeom prst="rect">
+            <a:avLst/>
+          </a:prstGeom>
+          <a:noFill/>
+        </p:spPr>
+        <p:txBody>
+          <a:bodyPr wrap="none" rtlCol="0">
+            <a:spAutoFit/>
+          </a:bodyPr>
+          <a:lstStyle/>
+          <a:p>
+            <a:r>
+              <a:rPr kumimoji="1" lang="ja-JP" altLang="en-US" sz="2400" dirty="0"/>
+              <a:t>視野角判定には３つのベクトルが必要になります。</a:t>
+            </a:r>
+            <a:endParaRPr kumimoji="1" lang="en-US" altLang="ja-JP" sz="2400" dirty="0"/>
+          </a:p>
+        </p:txBody>
+      </p:sp>
+      <p:pic>
+        <p:nvPicPr>
+          <p:cNvPr id="7" name="図 6">
+            <a:extLst>
+              <a:ext uri="{FF2B5EF4-FFF2-40B4-BE49-F238E27FC236}">
+                <a16:creationId xmlns:a16="http://schemas.microsoft.com/office/drawing/2014/main" id="{A6CA6E71-1755-4677-86B3-8009562964FB}"/>
+              </a:ext>
+            </a:extLst>
+          </p:cNvPr>
+          <p:cNvPicPr>
+            <a:picLocks noChangeAspect="1"/>
+          </p:cNvPicPr>
+          <p:nvPr/>
+        </p:nvPicPr>
+        <p:blipFill>
+          <a:blip r:embed="rId2">
+            <a:extLst>
+              <a:ext uri="{28A0092B-C50C-407E-A947-70E740481C1C}">
+                <a14:useLocalDpi xmlns:a14="http://schemas.microsoft.com/office/drawing/2010/main" val="0"/>
+              </a:ext>
+            </a:extLst>
+          </a:blip>
+          <a:stretch>
+            <a:fillRect/>
+          </a:stretch>
+        </p:blipFill>
+        <p:spPr>
+          <a:xfrm>
+            <a:off x="3536389" y="4631205"/>
+            <a:ext cx="544265" cy="1088530"/>
+          </a:xfrm>
+          <a:prstGeom prst="rect">
+            <a:avLst/>
+          </a:prstGeom>
+        </p:spPr>
+      </p:pic>
+      <p:pic>
+        <p:nvPicPr>
+          <p:cNvPr id="8" name="図 7">
+            <a:extLst>
+              <a:ext uri="{FF2B5EF4-FFF2-40B4-BE49-F238E27FC236}">
+                <a16:creationId xmlns:a16="http://schemas.microsoft.com/office/drawing/2014/main" id="{EF181451-BD0B-49FC-A7D6-75A57F024189}"/>
+              </a:ext>
+            </a:extLst>
+          </p:cNvPr>
+          <p:cNvPicPr>
+            <a:picLocks noChangeAspect="1"/>
+          </p:cNvPicPr>
+          <p:nvPr/>
+        </p:nvPicPr>
+        <p:blipFill>
+          <a:blip r:embed="rId3">
+            <a:extLst>
+              <a:ext uri="{28A0092B-C50C-407E-A947-70E740481C1C}">
+                <a14:useLocalDpi xmlns:a14="http://schemas.microsoft.com/office/drawing/2010/main" val="0"/>
+              </a:ext>
+            </a:extLst>
+          </a:blip>
+          <a:stretch>
+            <a:fillRect/>
+          </a:stretch>
+        </p:blipFill>
+        <p:spPr>
+          <a:xfrm>
+            <a:off x="850536" y="3672951"/>
+            <a:ext cx="720931" cy="720931"/>
+          </a:xfrm>
+          <a:prstGeom prst="rect">
+            <a:avLst/>
+          </a:prstGeom>
+        </p:spPr>
+      </p:pic>
+      <p:sp>
+        <p:nvSpPr>
+          <p:cNvPr id="5" name="部分円 4">
+            <a:extLst>
+              <a:ext uri="{FF2B5EF4-FFF2-40B4-BE49-F238E27FC236}">
+                <a16:creationId xmlns:a16="http://schemas.microsoft.com/office/drawing/2014/main" id="{E6EB77CC-532F-44BA-93D9-BAF9AD41226D}"/>
+              </a:ext>
+            </a:extLst>
+          </p:cNvPr>
+          <p:cNvSpPr/>
+          <p:nvPr/>
+        </p:nvSpPr>
+        <p:spPr>
+          <a:xfrm rot="9024398">
+            <a:off x="-1315418" y="1333416"/>
+            <a:ext cx="5400000" cy="5400000"/>
+          </a:xfrm>
+          <a:prstGeom prst="pie">
+            <a:avLst>
+              <a:gd name="adj1" fmla="val 10273235"/>
+              <a:gd name="adj2" fmla="val 14667644"/>
+            </a:avLst>
+          </a:prstGeom>
+          <a:solidFill>
+            <a:srgbClr val="FF0000">
+              <a:alpha val="30196"/>
+            </a:srgbClr>
+          </a:solidFill>
+          <a:ln>
+            <a:noFill/>
+          </a:ln>
+        </p:spPr>
+        <p:style>
+          <a:lnRef idx="2">
+            <a:schemeClr val="accent1">
+              <a:shade val="50000"/>
+            </a:schemeClr>
+          </a:lnRef>
+          <a:fillRef idx="1">
+            <a:schemeClr val="accent1"/>
+          </a:fillRef>
+          <a:effectRef idx="0">
+            <a:schemeClr val="accent1"/>
+          </a:effectRef>
+          <a:fontRef idx="minor">
+            <a:schemeClr val="lt1"/>
+          </a:fontRef>
+        </p:style>
+        <p:txBody>
+          <a:bodyPr rtlCol="0" anchor="ctr"/>
+          <a:lstStyle/>
+          <a:p>
+            <a:pPr algn="ctr"/>
+            <a:endParaRPr kumimoji="1" lang="ja-JP" altLang="en-US">
+              <a:solidFill>
+                <a:schemeClr val="tx1"/>
+              </a:solidFill>
+            </a:endParaRPr>
+          </a:p>
+        </p:txBody>
+      </p:sp>
+      <p:cxnSp>
+        <p:nvCxnSpPr>
+          <p:cNvPr id="12" name="直線矢印コネクタ 11">
+            <a:extLst>
+              <a:ext uri="{FF2B5EF4-FFF2-40B4-BE49-F238E27FC236}">
+                <a16:creationId xmlns:a16="http://schemas.microsoft.com/office/drawing/2014/main" id="{41D64771-9E92-4E5D-8D2C-058B4DA587AA}"/>
+              </a:ext>
+            </a:extLst>
+          </p:cNvPr>
+          <p:cNvCxnSpPr>
+            <a:cxnSpLocks/>
+          </p:cNvCxnSpPr>
+          <p:nvPr/>
+        </p:nvCxnSpPr>
+        <p:spPr>
+          <a:xfrm>
+            <a:off x="1571467" y="4140993"/>
+            <a:ext cx="2053860" cy="570856"/>
+          </a:xfrm>
+          <a:prstGeom prst="straightConnector1">
+            <a:avLst/>
+          </a:prstGeom>
+          <a:ln w="38100">
+            <a:solidFill>
+              <a:srgbClr val="FF0000"/>
+            </a:solidFill>
+            <a:tailEnd type="triangle"/>
+          </a:ln>
+        </p:spPr>
+        <p:style>
+          <a:lnRef idx="1">
+            <a:schemeClr val="accent1"/>
+          </a:lnRef>
+          <a:fillRef idx="0">
+            <a:schemeClr val="accent1"/>
+          </a:fillRef>
+          <a:effectRef idx="0">
+            <a:schemeClr val="accent1"/>
+          </a:effectRef>
+          <a:fontRef idx="minor">
+            <a:schemeClr val="tx1"/>
+          </a:fontRef>
+        </p:style>
+      </p:cxnSp>
+      <p:cxnSp>
+        <p:nvCxnSpPr>
+          <p:cNvPr id="16" name="直線矢印コネクタ 15">
+            <a:extLst>
+              <a:ext uri="{FF2B5EF4-FFF2-40B4-BE49-F238E27FC236}">
+                <a16:creationId xmlns:a16="http://schemas.microsoft.com/office/drawing/2014/main" id="{603DD444-9285-40C8-B1B1-68E9316976E1}"/>
+              </a:ext>
+            </a:extLst>
+          </p:cNvPr>
+          <p:cNvCxnSpPr>
+            <a:cxnSpLocks/>
+          </p:cNvCxnSpPr>
+          <p:nvPr/>
+        </p:nvCxnSpPr>
+        <p:spPr>
+          <a:xfrm>
+            <a:off x="1568267" y="4033493"/>
+            <a:ext cx="529474" cy="0"/>
+          </a:xfrm>
+          <a:prstGeom prst="straightConnector1">
+            <a:avLst/>
+          </a:prstGeom>
+          <a:ln w="38100">
+            <a:solidFill>
+              <a:srgbClr val="00B050"/>
+            </a:solidFill>
+            <a:tailEnd type="triangle"/>
+          </a:ln>
+        </p:spPr>
+        <p:style>
+          <a:lnRef idx="1">
+            <a:schemeClr val="accent1"/>
+          </a:lnRef>
+          <a:fillRef idx="0">
+            <a:schemeClr val="accent1"/>
+          </a:fillRef>
+          <a:effectRef idx="0">
+            <a:schemeClr val="accent1"/>
+          </a:effectRef>
+          <a:fontRef idx="minor">
+            <a:schemeClr val="tx1"/>
+          </a:fontRef>
+        </p:style>
+      </p:cxnSp>
+      <p:cxnSp>
+        <p:nvCxnSpPr>
+          <p:cNvPr id="18" name="直線矢印コネクタ 17">
+            <a:extLst>
+              <a:ext uri="{FF2B5EF4-FFF2-40B4-BE49-F238E27FC236}">
+                <a16:creationId xmlns:a16="http://schemas.microsoft.com/office/drawing/2014/main" id="{2464F546-FF8D-4253-A40E-0B09B80B450B}"/>
+              </a:ext>
+            </a:extLst>
+          </p:cNvPr>
+          <p:cNvCxnSpPr>
+            <a:cxnSpLocks/>
+          </p:cNvCxnSpPr>
+          <p:nvPr/>
+        </p:nvCxnSpPr>
+        <p:spPr>
+          <a:xfrm flipV="1">
+            <a:off x="1568267" y="2312894"/>
+            <a:ext cx="1968122" cy="1604058"/>
+          </a:xfrm>
+          <a:prstGeom prst="straightConnector1">
+            <a:avLst/>
+          </a:prstGeom>
+          <a:ln w="38100">
+            <a:solidFill>
+              <a:srgbClr val="0070C0"/>
+            </a:solidFill>
+            <a:tailEnd type="triangle"/>
+          </a:ln>
+        </p:spPr>
+        <p:style>
+          <a:lnRef idx="1">
+            <a:schemeClr val="accent1"/>
+          </a:lnRef>
+          <a:fillRef idx="0">
+            <a:schemeClr val="accent1"/>
+          </a:fillRef>
+          <a:effectRef idx="0">
+            <a:schemeClr val="accent1"/>
+          </a:effectRef>
+          <a:fontRef idx="minor">
+            <a:schemeClr val="tx1"/>
+          </a:fontRef>
+        </p:style>
+      </p:cxnSp>
+      <p:sp>
+        <p:nvSpPr>
+          <p:cNvPr id="20" name="テキスト ボックス 19">
+            <a:extLst>
+              <a:ext uri="{FF2B5EF4-FFF2-40B4-BE49-F238E27FC236}">
+                <a16:creationId xmlns:a16="http://schemas.microsoft.com/office/drawing/2014/main" id="{54FACF83-FC2D-4CC6-99D4-92E44BDF9253}"/>
+              </a:ext>
+            </a:extLst>
+          </p:cNvPr>
+          <p:cNvSpPr txBox="1"/>
+          <p:nvPr/>
+        </p:nvSpPr>
+        <p:spPr>
+          <a:xfrm>
+            <a:off x="5511442" y="2888121"/>
+            <a:ext cx="5320687" cy="1569660"/>
+          </a:xfrm>
+          <a:prstGeom prst="rect">
+            <a:avLst/>
+          </a:prstGeom>
+          <a:noFill/>
+        </p:spPr>
+        <p:txBody>
+          <a:bodyPr wrap="none" rtlCol="0">
+            <a:spAutoFit/>
+          </a:bodyPr>
+          <a:lstStyle/>
+          <a:p>
+            <a:r>
+              <a:rPr lang="ja-JP" altLang="en-US" sz="2400" dirty="0"/>
+              <a:t>■必要なベクトル</a:t>
+            </a:r>
+            <a:endParaRPr lang="en-US" altLang="ja-JP" sz="2400" dirty="0"/>
+          </a:p>
+          <a:p>
+            <a:r>
+              <a:rPr lang="en-US" altLang="ja-JP" sz="2400" b="1" dirty="0">
+                <a:solidFill>
+                  <a:srgbClr val="FF0000"/>
+                </a:solidFill>
+              </a:rPr>
+              <a:t>A</a:t>
+            </a:r>
+            <a:r>
+              <a:rPr lang="ja-JP" altLang="en-US" sz="2400" b="1" dirty="0">
+                <a:solidFill>
+                  <a:srgbClr val="FF0000"/>
+                </a:solidFill>
+              </a:rPr>
+              <a:t>：</a:t>
+            </a:r>
+            <a:r>
+              <a:rPr kumimoji="1" lang="ja-JP" altLang="en-US" sz="2400" b="1" dirty="0">
+                <a:solidFill>
+                  <a:srgbClr val="FF0000"/>
+                </a:solidFill>
+              </a:rPr>
+              <a:t>敵からターゲットまでのベクトル</a:t>
+            </a:r>
+            <a:endParaRPr kumimoji="1" lang="en-US" altLang="ja-JP" sz="2400" b="1" dirty="0">
+              <a:solidFill>
+                <a:srgbClr val="FF0000"/>
+              </a:solidFill>
+            </a:endParaRPr>
+          </a:p>
+          <a:p>
+            <a:r>
+              <a:rPr lang="en-US" altLang="ja-JP" sz="2400" b="1" dirty="0">
+                <a:solidFill>
+                  <a:srgbClr val="00B050"/>
+                </a:solidFill>
+              </a:rPr>
+              <a:t>B</a:t>
+            </a:r>
+            <a:r>
+              <a:rPr lang="ja-JP" altLang="en-US" sz="2400" b="1" dirty="0">
+                <a:solidFill>
+                  <a:srgbClr val="00B050"/>
+                </a:solidFill>
+              </a:rPr>
+              <a:t>：</a:t>
+            </a:r>
+            <a:r>
+              <a:rPr kumimoji="1" lang="ja-JP" altLang="en-US" sz="2400" b="1" dirty="0">
+                <a:solidFill>
+                  <a:srgbClr val="00B050"/>
+                </a:solidFill>
+              </a:rPr>
+              <a:t>向きベクトル</a:t>
+            </a:r>
+            <a:endParaRPr kumimoji="1" lang="en-US" altLang="ja-JP" sz="2400" b="1" dirty="0">
+              <a:solidFill>
+                <a:srgbClr val="00B050"/>
+              </a:solidFill>
+            </a:endParaRPr>
+          </a:p>
+          <a:p>
+            <a:r>
+              <a:rPr lang="en-US" altLang="ja-JP" sz="2400" b="1" dirty="0">
+                <a:solidFill>
+                  <a:srgbClr val="0070C0"/>
+                </a:solidFill>
+              </a:rPr>
+              <a:t>C</a:t>
+            </a:r>
+            <a:r>
+              <a:rPr lang="ja-JP" altLang="en-US" sz="2400" b="1" dirty="0">
+                <a:solidFill>
+                  <a:srgbClr val="0070C0"/>
+                </a:solidFill>
+              </a:rPr>
+              <a:t>：視野の端に沿ったベクトル</a:t>
+            </a:r>
+            <a:endParaRPr kumimoji="1" lang="en-US" altLang="ja-JP" sz="2400" b="1" dirty="0">
+              <a:solidFill>
+                <a:srgbClr val="0070C0"/>
+              </a:solidFill>
+            </a:endParaRPr>
+          </a:p>
+        </p:txBody>
+      </p:sp>
+    </p:spTree>
+    <p:extLst>
+      <p:ext uri="{BB962C8B-B14F-4D97-AF65-F5344CB8AC3E}">
+        <p14:creationId xmlns:p14="http://schemas.microsoft.com/office/powerpoint/2010/main" val="2181107378"/>
+      </p:ext>
+    </p:extLst>
+  </p:cSld>
+  <p:clrMapOvr>
+    <a:masterClrMapping/>
+  </p:clrMapOvr>
+</p:sld>
+</file>
+
+<file path=ppt/slides/slide5.xml><?xml version="1.0" encoding="utf-8"?>
+<p:sld xmlns:a="http://schemas.openxmlformats.org/drawingml/2006/main" xmlns:r="http://schemas.openxmlformats.org/officeDocument/2006/relationships" xmlns:p="http://schemas.openxmlformats.org/presentationml/2006/main">
+  <p:cSld>
+    <p:spTree>
+      <p:nvGrpSpPr>
+        <p:cNvPr id="1" name=""/>
+        <p:cNvGrpSpPr/>
+        <p:nvPr/>
+      </p:nvGrpSpPr>
+      <p:grpSpPr>
+        <a:xfrm>
+          <a:off x="0" y="0"/>
+          <a:ext cx="0" cy="0"/>
+          <a:chOff x="0" y="0"/>
+          <a:chExt cx="0" cy="0"/>
+        </a:xfrm>
+      </p:grpSpPr>
+      <p:sp>
+        <p:nvSpPr>
+          <p:cNvPr id="4" name="テキスト ボックス 3">
+            <a:extLst>
+              <a:ext uri="{FF2B5EF4-FFF2-40B4-BE49-F238E27FC236}">
+                <a16:creationId xmlns:a16="http://schemas.microsoft.com/office/drawing/2014/main" id="{5A13BF46-B8C5-48AA-8308-C9ECFF431A18}"/>
+              </a:ext>
+            </a:extLst>
+          </p:cNvPr>
+          <p:cNvSpPr txBox="1"/>
+          <p:nvPr/>
+        </p:nvSpPr>
+        <p:spPr>
+          <a:xfrm>
+            <a:off x="567542" y="491954"/>
+            <a:ext cx="3584636" cy="584775"/>
+          </a:xfrm>
+          <a:prstGeom prst="rect">
+            <a:avLst/>
+          </a:prstGeom>
+          <a:noFill/>
+        </p:spPr>
+        <p:txBody>
+          <a:bodyPr wrap="none" rtlCol="0">
+            <a:spAutoFit/>
+          </a:bodyPr>
+          <a:lstStyle/>
+          <a:p>
+            <a:r>
+              <a:rPr kumimoji="1" lang="ja-JP" altLang="en-US" sz="3200" b="1" u="sng" dirty="0"/>
+              <a:t>視野角判定 仕組み</a:t>
+            </a:r>
+          </a:p>
+        </p:txBody>
+      </p:sp>
+      <p:sp>
+        <p:nvSpPr>
+          <p:cNvPr id="6" name="テキスト ボックス 5">
+            <a:extLst>
+              <a:ext uri="{FF2B5EF4-FFF2-40B4-BE49-F238E27FC236}">
+                <a16:creationId xmlns:a16="http://schemas.microsoft.com/office/drawing/2014/main" id="{55830AD6-028B-4C4E-80BF-B70DFC1C3A46}"/>
+              </a:ext>
+            </a:extLst>
+          </p:cNvPr>
+          <p:cNvSpPr txBox="1"/>
+          <p:nvPr/>
+        </p:nvSpPr>
+        <p:spPr>
+          <a:xfrm>
+            <a:off x="567542" y="1216429"/>
+            <a:ext cx="7574509" cy="830997"/>
+          </a:xfrm>
+          <a:prstGeom prst="rect">
+            <a:avLst/>
+          </a:prstGeom>
+          <a:noFill/>
+        </p:spPr>
+        <p:txBody>
+          <a:bodyPr wrap="none" rtlCol="0">
+            <a:spAutoFit/>
+          </a:bodyPr>
+          <a:lstStyle/>
+          <a:p>
+            <a:r>
+              <a:rPr kumimoji="1" lang="ja-JP" altLang="en-US" sz="2400" dirty="0"/>
+              <a:t>３つのベクトルを正規化して</a:t>
+            </a:r>
+            <a:r>
+              <a:rPr kumimoji="1" lang="ja-JP" altLang="en-US" sz="2400" b="1" dirty="0">
+                <a:solidFill>
+                  <a:srgbClr val="FF0000"/>
+                </a:solidFill>
+              </a:rPr>
+              <a:t>長さを１に揃えます。</a:t>
+            </a:r>
+            <a:endParaRPr kumimoji="1" lang="en-US" altLang="ja-JP" sz="2400" b="1" dirty="0">
+              <a:solidFill>
+                <a:srgbClr val="FF0000"/>
+              </a:solidFill>
+            </a:endParaRPr>
+          </a:p>
+          <a:p>
+            <a:r>
+              <a:rPr lang="ja-JP" altLang="en-US" sz="2400" dirty="0"/>
+              <a:t>この時の</a:t>
+            </a:r>
+            <a:r>
+              <a:rPr lang="en-US" altLang="ja-JP" sz="2400" b="1" dirty="0">
+                <a:solidFill>
+                  <a:srgbClr val="FF0000"/>
+                </a:solidFill>
+              </a:rPr>
+              <a:t>A</a:t>
+            </a:r>
+            <a:r>
+              <a:rPr lang="ja-JP" altLang="en-US" sz="2400" dirty="0"/>
+              <a:t>と</a:t>
+            </a:r>
+            <a:r>
+              <a:rPr lang="en-US" altLang="ja-JP" sz="2400" b="1" dirty="0">
+                <a:solidFill>
+                  <a:srgbClr val="0070C0"/>
+                </a:solidFill>
+              </a:rPr>
+              <a:t>C</a:t>
+            </a:r>
+            <a:r>
+              <a:rPr lang="ja-JP" altLang="en-US" sz="2400" dirty="0"/>
+              <a:t>のベクトルを</a:t>
+            </a:r>
+            <a:r>
+              <a:rPr lang="en-US" altLang="ja-JP" sz="2400" b="1" dirty="0">
+                <a:solidFill>
+                  <a:srgbClr val="00B050"/>
+                </a:solidFill>
+              </a:rPr>
+              <a:t>B</a:t>
+            </a:r>
+            <a:r>
+              <a:rPr lang="ja-JP" altLang="en-US" sz="2400" b="1" dirty="0">
+                <a:solidFill>
+                  <a:srgbClr val="00B050"/>
+                </a:solidFill>
+              </a:rPr>
+              <a:t>ベクトル</a:t>
+            </a:r>
+            <a:r>
+              <a:rPr lang="ja-JP" altLang="en-US" sz="2400" dirty="0"/>
+              <a:t>に投影します。</a:t>
+            </a:r>
+            <a:endParaRPr kumimoji="1" lang="en-US" altLang="ja-JP" sz="2400" dirty="0"/>
+          </a:p>
+        </p:txBody>
+      </p:sp>
+      <p:pic>
+        <p:nvPicPr>
+          <p:cNvPr id="7" name="図 6">
+            <a:extLst>
+              <a:ext uri="{FF2B5EF4-FFF2-40B4-BE49-F238E27FC236}">
+                <a16:creationId xmlns:a16="http://schemas.microsoft.com/office/drawing/2014/main" id="{A6CA6E71-1755-4677-86B3-8009562964FB}"/>
+              </a:ext>
+            </a:extLst>
+          </p:cNvPr>
+          <p:cNvPicPr>
+            <a:picLocks noChangeAspect="1"/>
+          </p:cNvPicPr>
+          <p:nvPr/>
+        </p:nvPicPr>
+        <p:blipFill>
+          <a:blip r:embed="rId2">
+            <a:extLst>
+              <a:ext uri="{28A0092B-C50C-407E-A947-70E740481C1C}">
+                <a14:useLocalDpi xmlns:a14="http://schemas.microsoft.com/office/drawing/2010/main" val="0"/>
+              </a:ext>
+            </a:extLst>
+          </a:blip>
+          <a:stretch>
+            <a:fillRect/>
+          </a:stretch>
+        </p:blipFill>
+        <p:spPr>
+          <a:xfrm>
+            <a:off x="3536389" y="4631205"/>
+            <a:ext cx="544265" cy="1088530"/>
+          </a:xfrm>
+          <a:prstGeom prst="rect">
+            <a:avLst/>
+          </a:prstGeom>
+        </p:spPr>
+      </p:pic>
+      <p:pic>
+        <p:nvPicPr>
+          <p:cNvPr id="8" name="図 7">
+            <a:extLst>
+              <a:ext uri="{FF2B5EF4-FFF2-40B4-BE49-F238E27FC236}">
+                <a16:creationId xmlns:a16="http://schemas.microsoft.com/office/drawing/2014/main" id="{EF181451-BD0B-49FC-A7D6-75A57F024189}"/>
+              </a:ext>
+            </a:extLst>
+          </p:cNvPr>
+          <p:cNvPicPr>
+            <a:picLocks noChangeAspect="1"/>
+          </p:cNvPicPr>
+          <p:nvPr/>
+        </p:nvPicPr>
+        <p:blipFill>
+          <a:blip r:embed="rId3">
+            <a:extLst>
+              <a:ext uri="{28A0092B-C50C-407E-A947-70E740481C1C}">
+                <a14:useLocalDpi xmlns:a14="http://schemas.microsoft.com/office/drawing/2010/main" val="0"/>
+              </a:ext>
+            </a:extLst>
+          </a:blip>
+          <a:stretch>
+            <a:fillRect/>
+          </a:stretch>
+        </p:blipFill>
+        <p:spPr>
+          <a:xfrm>
+            <a:off x="850536" y="3672951"/>
+            <a:ext cx="720931" cy="720931"/>
+          </a:xfrm>
+          <a:prstGeom prst="rect">
+            <a:avLst/>
+          </a:prstGeom>
+        </p:spPr>
+      </p:pic>
+      <p:sp>
+        <p:nvSpPr>
+          <p:cNvPr id="5" name="部分円 4">
+            <a:extLst>
+              <a:ext uri="{FF2B5EF4-FFF2-40B4-BE49-F238E27FC236}">
+                <a16:creationId xmlns:a16="http://schemas.microsoft.com/office/drawing/2014/main" id="{E6EB77CC-532F-44BA-93D9-BAF9AD41226D}"/>
+              </a:ext>
+            </a:extLst>
+          </p:cNvPr>
+          <p:cNvSpPr/>
+          <p:nvPr/>
+        </p:nvSpPr>
+        <p:spPr>
+          <a:xfrm rot="9024398">
+            <a:off x="-1315418" y="1333416"/>
+            <a:ext cx="5400000" cy="5400000"/>
+          </a:xfrm>
+          <a:prstGeom prst="pie">
+            <a:avLst>
+              <a:gd name="adj1" fmla="val 10273235"/>
+              <a:gd name="adj2" fmla="val 14667644"/>
+            </a:avLst>
+          </a:prstGeom>
+          <a:solidFill>
+            <a:srgbClr val="FF0000">
+              <a:alpha val="30196"/>
+            </a:srgbClr>
+          </a:solidFill>
+          <a:ln>
+            <a:noFill/>
+          </a:ln>
+        </p:spPr>
+        <p:style>
+          <a:lnRef idx="2">
+            <a:schemeClr val="accent1">
+              <a:shade val="50000"/>
+            </a:schemeClr>
+          </a:lnRef>
+          <a:fillRef idx="1">
+            <a:schemeClr val="accent1"/>
+          </a:fillRef>
+          <a:effectRef idx="0">
+            <a:schemeClr val="accent1"/>
+          </a:effectRef>
+          <a:fontRef idx="minor">
+            <a:schemeClr val="lt1"/>
+          </a:fontRef>
+        </p:style>
+        <p:txBody>
+          <a:bodyPr rtlCol="0" anchor="ctr"/>
+          <a:lstStyle/>
+          <a:p>
+            <a:pPr algn="ctr"/>
+            <a:endParaRPr kumimoji="1" lang="ja-JP" altLang="en-US">
+              <a:solidFill>
+                <a:schemeClr val="tx1"/>
+              </a:solidFill>
+            </a:endParaRPr>
+          </a:p>
+        </p:txBody>
+      </p:sp>
+      <p:cxnSp>
+        <p:nvCxnSpPr>
+          <p:cNvPr id="12" name="直線矢印コネクタ 11">
+            <a:extLst>
+              <a:ext uri="{FF2B5EF4-FFF2-40B4-BE49-F238E27FC236}">
+                <a16:creationId xmlns:a16="http://schemas.microsoft.com/office/drawing/2014/main" id="{41D64771-9E92-4E5D-8D2C-058B4DA587AA}"/>
+              </a:ext>
+            </a:extLst>
+          </p:cNvPr>
+          <p:cNvCxnSpPr>
+            <a:cxnSpLocks/>
+          </p:cNvCxnSpPr>
+          <p:nvPr/>
+        </p:nvCxnSpPr>
+        <p:spPr>
+          <a:xfrm>
+            <a:off x="1571467" y="4140993"/>
+            <a:ext cx="452066" cy="92340"/>
+          </a:xfrm>
+          <a:prstGeom prst="straightConnector1">
+            <a:avLst/>
+          </a:prstGeom>
+          <a:ln w="38100">
+            <a:solidFill>
+              <a:srgbClr val="FF0000"/>
+            </a:solidFill>
+            <a:tailEnd type="triangle"/>
+          </a:ln>
+        </p:spPr>
+        <p:style>
+          <a:lnRef idx="1">
+            <a:schemeClr val="accent1"/>
+          </a:lnRef>
+          <a:fillRef idx="0">
+            <a:schemeClr val="accent1"/>
+          </a:fillRef>
+          <a:effectRef idx="0">
+            <a:schemeClr val="accent1"/>
+          </a:effectRef>
+          <a:fontRef idx="minor">
+            <a:schemeClr val="tx1"/>
+          </a:fontRef>
+        </p:style>
+      </p:cxnSp>
+      <p:cxnSp>
+        <p:nvCxnSpPr>
+          <p:cNvPr id="16" name="直線矢印コネクタ 15">
+            <a:extLst>
+              <a:ext uri="{FF2B5EF4-FFF2-40B4-BE49-F238E27FC236}">
+                <a16:creationId xmlns:a16="http://schemas.microsoft.com/office/drawing/2014/main" id="{603DD444-9285-40C8-B1B1-68E9316976E1}"/>
+              </a:ext>
+            </a:extLst>
+          </p:cNvPr>
+          <p:cNvCxnSpPr>
+            <a:cxnSpLocks/>
+          </p:cNvCxnSpPr>
+          <p:nvPr/>
+        </p:nvCxnSpPr>
+        <p:spPr>
+          <a:xfrm>
+            <a:off x="1568267" y="4033493"/>
+            <a:ext cx="529474" cy="0"/>
+          </a:xfrm>
+          <a:prstGeom prst="straightConnector1">
+            <a:avLst/>
+          </a:prstGeom>
+          <a:ln w="38100">
+            <a:solidFill>
+              <a:srgbClr val="00B050"/>
+            </a:solidFill>
+            <a:tailEnd type="triangle"/>
+          </a:ln>
+        </p:spPr>
+        <p:style>
+          <a:lnRef idx="1">
+            <a:schemeClr val="accent1"/>
+          </a:lnRef>
+          <a:fillRef idx="0">
+            <a:schemeClr val="accent1"/>
+          </a:fillRef>
+          <a:effectRef idx="0">
+            <a:schemeClr val="accent1"/>
+          </a:effectRef>
+          <a:fontRef idx="minor">
+            <a:schemeClr val="tx1"/>
+          </a:fontRef>
+        </p:style>
+      </p:cxnSp>
+      <p:cxnSp>
+        <p:nvCxnSpPr>
+          <p:cNvPr id="18" name="直線矢印コネクタ 17">
+            <a:extLst>
+              <a:ext uri="{FF2B5EF4-FFF2-40B4-BE49-F238E27FC236}">
+                <a16:creationId xmlns:a16="http://schemas.microsoft.com/office/drawing/2014/main" id="{2464F546-FF8D-4253-A40E-0B09B80B450B}"/>
+              </a:ext>
+            </a:extLst>
+          </p:cNvPr>
+          <p:cNvCxnSpPr>
+            <a:cxnSpLocks/>
+          </p:cNvCxnSpPr>
+          <p:nvPr/>
+        </p:nvCxnSpPr>
+        <p:spPr>
+          <a:xfrm flipV="1">
+            <a:off x="1568267" y="3606800"/>
+            <a:ext cx="336733" cy="310153"/>
+          </a:xfrm>
+          <a:prstGeom prst="straightConnector1">
+            <a:avLst/>
+          </a:prstGeom>
+          <a:ln w="38100">
+            <a:solidFill>
+              <a:srgbClr val="0070C0"/>
+            </a:solidFill>
+            <a:tailEnd type="triangle"/>
+          </a:ln>
+        </p:spPr>
+        <p:style>
+          <a:lnRef idx="1">
+            <a:schemeClr val="accent1"/>
+          </a:lnRef>
+          <a:fillRef idx="0">
+            <a:schemeClr val="accent1"/>
+          </a:fillRef>
+          <a:effectRef idx="0">
+            <a:schemeClr val="accent1"/>
+          </a:effectRef>
+          <a:fontRef idx="minor">
+            <a:schemeClr val="tx1"/>
+          </a:fontRef>
+        </p:style>
+      </p:cxnSp>
+    </p:spTree>
+    <p:extLst>
+      <p:ext uri="{BB962C8B-B14F-4D97-AF65-F5344CB8AC3E}">
+        <p14:creationId xmlns:p14="http://schemas.microsoft.com/office/powerpoint/2010/main" val="316975203"/>
+      </p:ext>
+    </p:extLst>
+  </p:cSld>
+  <p:clrMapOvr>
+    <a:masterClrMapping/>
+  </p:clrMapOvr>
+</p:sld>
+</file>
+
+<file path=ppt/slides/slide6.xml><?xml version="1.0" encoding="utf-8"?>
+<p:sld xmlns:a="http://schemas.openxmlformats.org/drawingml/2006/main" xmlns:r="http://schemas.openxmlformats.org/officeDocument/2006/relationships" xmlns:p="http://schemas.openxmlformats.org/presentationml/2006/main">
+  <p:cSld>
+    <p:spTree>
+      <p:nvGrpSpPr>
+        <p:cNvPr id="1" name=""/>
+        <p:cNvGrpSpPr/>
+        <p:nvPr/>
+      </p:nvGrpSpPr>
+      <p:grpSpPr>
+        <a:xfrm>
+          <a:off x="0" y="0"/>
+          <a:ext cx="0" cy="0"/>
+          <a:chOff x="0" y="0"/>
+          <a:chExt cx="0" cy="0"/>
+        </a:xfrm>
+      </p:grpSpPr>
+      <p:sp>
+        <p:nvSpPr>
+          <p:cNvPr id="4" name="テキスト ボックス 3">
+            <a:extLst>
+              <a:ext uri="{FF2B5EF4-FFF2-40B4-BE49-F238E27FC236}">
+                <a16:creationId xmlns:a16="http://schemas.microsoft.com/office/drawing/2014/main" id="{5A13BF46-B8C5-48AA-8308-C9ECFF431A18}"/>
+              </a:ext>
+            </a:extLst>
+          </p:cNvPr>
+          <p:cNvSpPr txBox="1"/>
+          <p:nvPr/>
+        </p:nvSpPr>
+        <p:spPr>
+          <a:xfrm>
+            <a:off x="567542" y="491954"/>
+            <a:ext cx="3584636" cy="584775"/>
+          </a:xfrm>
+          <a:prstGeom prst="rect">
+            <a:avLst/>
+          </a:prstGeom>
+          <a:noFill/>
+        </p:spPr>
+        <p:txBody>
+          <a:bodyPr wrap="none" rtlCol="0">
+            <a:spAutoFit/>
+          </a:bodyPr>
+          <a:lstStyle/>
+          <a:p>
+            <a:r>
+              <a:rPr kumimoji="1" lang="ja-JP" altLang="en-US" sz="3200" b="1" u="sng" dirty="0"/>
+              <a:t>視野角判定 仕組み</a:t>
+            </a:r>
+          </a:p>
+        </p:txBody>
+      </p:sp>
+      <p:sp>
+        <p:nvSpPr>
+          <p:cNvPr id="6" name="テキスト ボックス 5">
+            <a:extLst>
+              <a:ext uri="{FF2B5EF4-FFF2-40B4-BE49-F238E27FC236}">
+                <a16:creationId xmlns:a16="http://schemas.microsoft.com/office/drawing/2014/main" id="{55830AD6-028B-4C4E-80BF-B70DFC1C3A46}"/>
+              </a:ext>
+            </a:extLst>
+          </p:cNvPr>
+          <p:cNvSpPr txBox="1"/>
+          <p:nvPr/>
+        </p:nvSpPr>
+        <p:spPr>
+          <a:xfrm>
+            <a:off x="567542" y="1216429"/>
+            <a:ext cx="8924238" cy="830997"/>
+          </a:xfrm>
+          <a:prstGeom prst="rect">
+            <a:avLst/>
+          </a:prstGeom>
+          <a:noFill/>
+        </p:spPr>
+        <p:txBody>
+          <a:bodyPr wrap="none" rtlCol="0">
+            <a:spAutoFit/>
+          </a:bodyPr>
+          <a:lstStyle/>
+          <a:p>
+            <a:r>
+              <a:rPr lang="ja-JP" altLang="en-US" sz="2400" dirty="0"/>
+              <a:t>ターゲットが視野角にいる場合は、</a:t>
+            </a:r>
+            <a:r>
+              <a:rPr lang="en-US" altLang="ja-JP" sz="2400" b="1" dirty="0">
+                <a:solidFill>
+                  <a:srgbClr val="FF0000"/>
+                </a:solidFill>
+              </a:rPr>
+              <a:t>A</a:t>
+            </a:r>
+            <a:r>
+              <a:rPr lang="ja-JP" altLang="en-US" sz="2400" b="1" dirty="0"/>
+              <a:t>・</a:t>
+            </a:r>
+            <a:r>
+              <a:rPr lang="en-US" altLang="ja-JP" sz="2400" b="1" dirty="0">
+                <a:solidFill>
+                  <a:srgbClr val="00B050"/>
+                </a:solidFill>
+              </a:rPr>
+              <a:t>B </a:t>
+            </a:r>
+            <a:r>
+              <a:rPr lang="ja-JP" altLang="en-US" sz="2400" b="1" dirty="0"/>
+              <a:t>≧</a:t>
+            </a:r>
+            <a:r>
+              <a:rPr lang="ja-JP" altLang="en-US" sz="2400" b="1" dirty="0">
+                <a:solidFill>
+                  <a:srgbClr val="00B050"/>
+                </a:solidFill>
+              </a:rPr>
+              <a:t> </a:t>
+            </a:r>
+            <a:r>
+              <a:rPr lang="en-US" altLang="ja-JP" sz="2400" b="1" dirty="0">
+                <a:solidFill>
+                  <a:srgbClr val="0070C0"/>
+                </a:solidFill>
+              </a:rPr>
+              <a:t>C</a:t>
+            </a:r>
+            <a:r>
+              <a:rPr lang="ja-JP" altLang="en-US" sz="2400" b="1" dirty="0"/>
+              <a:t>・</a:t>
+            </a:r>
+            <a:r>
+              <a:rPr lang="en-US" altLang="ja-JP" sz="2400" b="1" dirty="0">
+                <a:solidFill>
+                  <a:srgbClr val="00B050"/>
+                </a:solidFill>
+              </a:rPr>
+              <a:t>B</a:t>
+            </a:r>
+            <a:r>
+              <a:rPr lang="ja-JP" altLang="en-US" sz="2400" dirty="0"/>
+              <a:t>となります。</a:t>
+            </a:r>
+            <a:endParaRPr lang="en-US" altLang="ja-JP" sz="2400" dirty="0"/>
+          </a:p>
+          <a:p>
+            <a:r>
+              <a:rPr lang="ja-JP" altLang="en-US" sz="2400" dirty="0"/>
+              <a:t>（点線の黄色よりも橙の方が右側にある）</a:t>
+            </a:r>
+            <a:endParaRPr lang="en-US" altLang="ja-JP" sz="2400" dirty="0"/>
+          </a:p>
+        </p:txBody>
+      </p:sp>
+      <p:pic>
+        <p:nvPicPr>
+          <p:cNvPr id="7" name="図 6">
+            <a:extLst>
+              <a:ext uri="{FF2B5EF4-FFF2-40B4-BE49-F238E27FC236}">
+                <a16:creationId xmlns:a16="http://schemas.microsoft.com/office/drawing/2014/main" id="{A6CA6E71-1755-4677-86B3-8009562964FB}"/>
+              </a:ext>
+            </a:extLst>
+          </p:cNvPr>
+          <p:cNvPicPr>
+            <a:picLocks noChangeAspect="1"/>
+          </p:cNvPicPr>
+          <p:nvPr/>
+        </p:nvPicPr>
+        <p:blipFill>
+          <a:blip r:embed="rId2">
+            <a:extLst>
+              <a:ext uri="{28A0092B-C50C-407E-A947-70E740481C1C}">
+                <a14:useLocalDpi xmlns:a14="http://schemas.microsoft.com/office/drawing/2010/main" val="0"/>
+              </a:ext>
+            </a:extLst>
+          </a:blip>
+          <a:stretch>
+            <a:fillRect/>
+          </a:stretch>
+        </p:blipFill>
+        <p:spPr>
+          <a:xfrm>
+            <a:off x="3536389" y="4631205"/>
+            <a:ext cx="544265" cy="1088530"/>
+          </a:xfrm>
+          <a:prstGeom prst="rect">
+            <a:avLst/>
+          </a:prstGeom>
+        </p:spPr>
+      </p:pic>
+      <p:pic>
+        <p:nvPicPr>
+          <p:cNvPr id="8" name="図 7">
+            <a:extLst>
+              <a:ext uri="{FF2B5EF4-FFF2-40B4-BE49-F238E27FC236}">
+                <a16:creationId xmlns:a16="http://schemas.microsoft.com/office/drawing/2014/main" id="{EF181451-BD0B-49FC-A7D6-75A57F024189}"/>
+              </a:ext>
+            </a:extLst>
+          </p:cNvPr>
+          <p:cNvPicPr>
+            <a:picLocks noChangeAspect="1"/>
+          </p:cNvPicPr>
+          <p:nvPr/>
+        </p:nvPicPr>
+        <p:blipFill>
+          <a:blip r:embed="rId3">
+            <a:extLst>
+              <a:ext uri="{28A0092B-C50C-407E-A947-70E740481C1C}">
+                <a14:useLocalDpi xmlns:a14="http://schemas.microsoft.com/office/drawing/2010/main" val="0"/>
+              </a:ext>
+            </a:extLst>
+          </a:blip>
+          <a:stretch>
+            <a:fillRect/>
+          </a:stretch>
+        </p:blipFill>
+        <p:spPr>
+          <a:xfrm>
+            <a:off x="850536" y="3672951"/>
+            <a:ext cx="720931" cy="720931"/>
+          </a:xfrm>
+          <a:prstGeom prst="rect">
+            <a:avLst/>
+          </a:prstGeom>
+        </p:spPr>
+      </p:pic>
+      <p:sp>
+        <p:nvSpPr>
+          <p:cNvPr id="5" name="部分円 4">
+            <a:extLst>
+              <a:ext uri="{FF2B5EF4-FFF2-40B4-BE49-F238E27FC236}">
+                <a16:creationId xmlns:a16="http://schemas.microsoft.com/office/drawing/2014/main" id="{E6EB77CC-532F-44BA-93D9-BAF9AD41226D}"/>
+              </a:ext>
+            </a:extLst>
+          </p:cNvPr>
+          <p:cNvSpPr/>
+          <p:nvPr/>
+        </p:nvSpPr>
+        <p:spPr>
+          <a:xfrm rot="9024398">
+            <a:off x="-1315418" y="1333416"/>
+            <a:ext cx="5400000" cy="5400000"/>
+          </a:xfrm>
+          <a:prstGeom prst="pie">
+            <a:avLst>
+              <a:gd name="adj1" fmla="val 10273235"/>
+              <a:gd name="adj2" fmla="val 14667644"/>
+            </a:avLst>
+          </a:prstGeom>
+          <a:solidFill>
+            <a:srgbClr val="FF0000">
+              <a:alpha val="30196"/>
+            </a:srgbClr>
+          </a:solidFill>
+          <a:ln>
+            <a:noFill/>
+          </a:ln>
+        </p:spPr>
+        <p:style>
+          <a:lnRef idx="2">
+            <a:schemeClr val="accent1">
+              <a:shade val="50000"/>
+            </a:schemeClr>
+          </a:lnRef>
+          <a:fillRef idx="1">
+            <a:schemeClr val="accent1"/>
+          </a:fillRef>
+          <a:effectRef idx="0">
+            <a:schemeClr val="accent1"/>
+          </a:effectRef>
+          <a:fontRef idx="minor">
+            <a:schemeClr val="lt1"/>
+          </a:fontRef>
+        </p:style>
+        <p:txBody>
+          <a:bodyPr rtlCol="0" anchor="ctr"/>
+          <a:lstStyle/>
+          <a:p>
+            <a:pPr algn="ctr"/>
+            <a:endParaRPr kumimoji="1" lang="ja-JP" altLang="en-US">
+              <a:solidFill>
+                <a:schemeClr val="tx1"/>
+              </a:solidFill>
+            </a:endParaRPr>
+          </a:p>
+        </p:txBody>
+      </p:sp>
+      <p:cxnSp>
+        <p:nvCxnSpPr>
+          <p:cNvPr id="12" name="直線矢印コネクタ 11">
+            <a:extLst>
+              <a:ext uri="{FF2B5EF4-FFF2-40B4-BE49-F238E27FC236}">
+                <a16:creationId xmlns:a16="http://schemas.microsoft.com/office/drawing/2014/main" id="{41D64771-9E92-4E5D-8D2C-058B4DA587AA}"/>
+              </a:ext>
+            </a:extLst>
+          </p:cNvPr>
+          <p:cNvCxnSpPr>
+            <a:cxnSpLocks/>
+          </p:cNvCxnSpPr>
+          <p:nvPr/>
+        </p:nvCxnSpPr>
+        <p:spPr>
+          <a:xfrm>
+            <a:off x="1571467" y="4140993"/>
+            <a:ext cx="452066" cy="92340"/>
+          </a:xfrm>
+          <a:prstGeom prst="straightConnector1">
+            <a:avLst/>
+          </a:prstGeom>
+          <a:ln w="38100">
+            <a:solidFill>
+              <a:srgbClr val="FF0000"/>
+            </a:solidFill>
+            <a:tailEnd type="triangle"/>
+          </a:ln>
+        </p:spPr>
+        <p:style>
+          <a:lnRef idx="1">
+            <a:schemeClr val="accent1"/>
+          </a:lnRef>
+          <a:fillRef idx="0">
+            <a:schemeClr val="accent1"/>
+          </a:fillRef>
+          <a:effectRef idx="0">
+            <a:schemeClr val="accent1"/>
+          </a:effectRef>
+          <a:fontRef idx="minor">
+            <a:schemeClr val="tx1"/>
+          </a:fontRef>
+        </p:style>
+      </p:cxnSp>
+      <p:cxnSp>
+        <p:nvCxnSpPr>
+          <p:cNvPr id="16" name="直線矢印コネクタ 15">
+            <a:extLst>
+              <a:ext uri="{FF2B5EF4-FFF2-40B4-BE49-F238E27FC236}">
+                <a16:creationId xmlns:a16="http://schemas.microsoft.com/office/drawing/2014/main" id="{603DD444-9285-40C8-B1B1-68E9316976E1}"/>
+              </a:ext>
+            </a:extLst>
+          </p:cNvPr>
+          <p:cNvCxnSpPr>
+            <a:cxnSpLocks/>
+          </p:cNvCxnSpPr>
+          <p:nvPr/>
+        </p:nvCxnSpPr>
+        <p:spPr>
+          <a:xfrm>
+            <a:off x="1568267" y="4033493"/>
+            <a:ext cx="529474" cy="0"/>
+          </a:xfrm>
+          <a:prstGeom prst="straightConnector1">
+            <a:avLst/>
+          </a:prstGeom>
+          <a:ln w="38100">
+            <a:solidFill>
+              <a:srgbClr val="00B050"/>
+            </a:solidFill>
+            <a:tailEnd type="triangle"/>
+          </a:ln>
+        </p:spPr>
+        <p:style>
+          <a:lnRef idx="1">
+            <a:schemeClr val="accent1"/>
+          </a:lnRef>
+          <a:fillRef idx="0">
+            <a:schemeClr val="accent1"/>
+          </a:fillRef>
+          <a:effectRef idx="0">
+            <a:schemeClr val="accent1"/>
+          </a:effectRef>
+          <a:fontRef idx="minor">
+            <a:schemeClr val="tx1"/>
+          </a:fontRef>
+        </p:style>
+      </p:cxnSp>
+      <p:cxnSp>
+        <p:nvCxnSpPr>
+          <p:cNvPr id="18" name="直線矢印コネクタ 17">
+            <a:extLst>
+              <a:ext uri="{FF2B5EF4-FFF2-40B4-BE49-F238E27FC236}">
+                <a16:creationId xmlns:a16="http://schemas.microsoft.com/office/drawing/2014/main" id="{2464F546-FF8D-4253-A40E-0B09B80B450B}"/>
+              </a:ext>
+            </a:extLst>
+          </p:cNvPr>
+          <p:cNvCxnSpPr>
+            <a:cxnSpLocks/>
+          </p:cNvCxnSpPr>
+          <p:nvPr/>
+        </p:nvCxnSpPr>
+        <p:spPr>
+          <a:xfrm flipV="1">
+            <a:off x="1568267" y="3606800"/>
+            <a:ext cx="336733" cy="310153"/>
+          </a:xfrm>
+          <a:prstGeom prst="straightConnector1">
+            <a:avLst/>
+          </a:prstGeom>
+          <a:ln w="38100">
+            <a:solidFill>
+              <a:srgbClr val="0070C0"/>
+            </a:solidFill>
+            <a:tailEnd type="triangle"/>
+          </a:ln>
+        </p:spPr>
+        <p:style>
+          <a:lnRef idx="1">
+            <a:schemeClr val="accent1"/>
+          </a:lnRef>
+          <a:fillRef idx="0">
+            <a:schemeClr val="accent1"/>
+          </a:fillRef>
+          <a:effectRef idx="0">
+            <a:schemeClr val="accent1"/>
+          </a:effectRef>
+          <a:fontRef idx="minor">
+            <a:schemeClr val="tx1"/>
+          </a:fontRef>
+        </p:style>
+      </p:cxnSp>
+      <p:cxnSp>
+        <p:nvCxnSpPr>
+          <p:cNvPr id="3" name="直線コネクタ 2">
+            <a:extLst>
+              <a:ext uri="{FF2B5EF4-FFF2-40B4-BE49-F238E27FC236}">
+                <a16:creationId xmlns:a16="http://schemas.microsoft.com/office/drawing/2014/main" id="{99991011-598B-4A14-A48C-EE712D3BED67}"/>
+              </a:ext>
+            </a:extLst>
+          </p:cNvPr>
+          <p:cNvCxnSpPr>
+            <a:cxnSpLocks/>
+          </p:cNvCxnSpPr>
+          <p:nvPr/>
+        </p:nvCxnSpPr>
+        <p:spPr>
+          <a:xfrm flipH="1">
+            <a:off x="1905001" y="3606800"/>
+            <a:ext cx="1" cy="1955800"/>
+          </a:xfrm>
+          <a:prstGeom prst="line">
+            <a:avLst/>
+          </a:prstGeom>
+          <a:ln w="38100">
+            <a:solidFill>
+              <a:srgbClr val="FFFF00"/>
+            </a:solidFill>
+            <a:prstDash val="dash"/>
+          </a:ln>
+        </p:spPr>
+        <p:style>
+          <a:lnRef idx="1">
+            <a:schemeClr val="accent1"/>
+          </a:lnRef>
+          <a:fillRef idx="0">
+            <a:schemeClr val="accent1"/>
+          </a:fillRef>
+          <a:effectRef idx="0">
+            <a:schemeClr val="accent1"/>
+          </a:effectRef>
+          <a:fontRef idx="minor">
+            <a:schemeClr val="tx1"/>
+          </a:fontRef>
+        </p:style>
+      </p:cxnSp>
+      <p:cxnSp>
+        <p:nvCxnSpPr>
+          <p:cNvPr id="13" name="直線コネクタ 12">
+            <a:extLst>
+              <a:ext uri="{FF2B5EF4-FFF2-40B4-BE49-F238E27FC236}">
+                <a16:creationId xmlns:a16="http://schemas.microsoft.com/office/drawing/2014/main" id="{508727D9-DA9B-48AB-ADD5-4B9F60CF6089}"/>
+              </a:ext>
+            </a:extLst>
+          </p:cNvPr>
+          <p:cNvCxnSpPr>
+            <a:cxnSpLocks/>
+          </p:cNvCxnSpPr>
+          <p:nvPr/>
+        </p:nvCxnSpPr>
+        <p:spPr>
+          <a:xfrm>
+            <a:off x="2023533" y="3606800"/>
+            <a:ext cx="0" cy="1955800"/>
+          </a:xfrm>
+          <a:prstGeom prst="line">
+            <a:avLst/>
+          </a:prstGeom>
+          <a:ln w="38100">
+            <a:solidFill>
+              <a:srgbClr val="FFC000"/>
+            </a:solidFill>
+            <a:prstDash val="dash"/>
+          </a:ln>
+        </p:spPr>
+        <p:style>
+          <a:lnRef idx="1">
+            <a:schemeClr val="accent1"/>
+          </a:lnRef>
+          <a:fillRef idx="0">
+            <a:schemeClr val="accent1"/>
+          </a:fillRef>
+          <a:effectRef idx="0">
+            <a:schemeClr val="accent1"/>
+          </a:effectRef>
+          <a:fontRef idx="minor">
+            <a:schemeClr val="tx1"/>
+          </a:fontRef>
+        </p:style>
+      </p:cxnSp>
+      <p:cxnSp>
+        <p:nvCxnSpPr>
+          <p:cNvPr id="20" name="直線コネクタ 19">
+            <a:extLst>
+              <a:ext uri="{FF2B5EF4-FFF2-40B4-BE49-F238E27FC236}">
+                <a16:creationId xmlns:a16="http://schemas.microsoft.com/office/drawing/2014/main" id="{72369D7F-AEEF-4008-8EF6-879833803713}"/>
+              </a:ext>
+            </a:extLst>
+          </p:cNvPr>
+          <p:cNvCxnSpPr>
+            <a:cxnSpLocks/>
+          </p:cNvCxnSpPr>
+          <p:nvPr/>
+        </p:nvCxnSpPr>
+        <p:spPr>
+          <a:xfrm flipH="1">
+            <a:off x="1568267" y="6266208"/>
+            <a:ext cx="764678" cy="0"/>
+          </a:xfrm>
+          <a:prstGeom prst="line">
+            <a:avLst/>
+          </a:prstGeom>
+          <a:ln w="38100">
+            <a:solidFill>
+              <a:srgbClr val="FFFF00"/>
+            </a:solidFill>
+            <a:prstDash val="dash"/>
+          </a:ln>
+        </p:spPr>
+        <p:style>
+          <a:lnRef idx="1">
+            <a:schemeClr val="accent1"/>
+          </a:lnRef>
+          <a:fillRef idx="0">
+            <a:schemeClr val="accent1"/>
+          </a:fillRef>
+          <a:effectRef idx="0">
+            <a:schemeClr val="accent1"/>
+          </a:effectRef>
+          <a:fontRef idx="minor">
+            <a:schemeClr val="tx1"/>
+          </a:fontRef>
+        </p:style>
+      </p:cxnSp>
+      <p:cxnSp>
+        <p:nvCxnSpPr>
+          <p:cNvPr id="25" name="直線コネクタ 24">
+            <a:extLst>
+              <a:ext uri="{FF2B5EF4-FFF2-40B4-BE49-F238E27FC236}">
+                <a16:creationId xmlns:a16="http://schemas.microsoft.com/office/drawing/2014/main" id="{EA1C36FB-3931-4F3B-BD18-3A10FB112D5D}"/>
+              </a:ext>
+            </a:extLst>
+          </p:cNvPr>
+          <p:cNvCxnSpPr>
+            <a:cxnSpLocks/>
+          </p:cNvCxnSpPr>
+          <p:nvPr/>
+        </p:nvCxnSpPr>
+        <p:spPr>
+          <a:xfrm flipH="1">
+            <a:off x="1568267" y="5898795"/>
+            <a:ext cx="764678" cy="0"/>
+          </a:xfrm>
+          <a:prstGeom prst="line">
+            <a:avLst/>
+          </a:prstGeom>
+          <a:ln w="38100">
+            <a:solidFill>
+              <a:srgbClr val="FFC000"/>
+            </a:solidFill>
+            <a:prstDash val="dash"/>
+          </a:ln>
+        </p:spPr>
+        <p:style>
+          <a:lnRef idx="1">
+            <a:schemeClr val="accent1"/>
+          </a:lnRef>
+          <a:fillRef idx="0">
+            <a:schemeClr val="accent1"/>
+          </a:fillRef>
+          <a:effectRef idx="0">
+            <a:schemeClr val="accent1"/>
+          </a:effectRef>
+          <a:fontRef idx="minor">
+            <a:schemeClr val="tx1"/>
+          </a:fontRef>
+        </p:style>
+      </p:cxnSp>
+      <p:sp>
+        <p:nvSpPr>
+          <p:cNvPr id="26" name="テキスト ボックス 25">
+            <a:extLst>
+              <a:ext uri="{FF2B5EF4-FFF2-40B4-BE49-F238E27FC236}">
+                <a16:creationId xmlns:a16="http://schemas.microsoft.com/office/drawing/2014/main" id="{846E2391-7905-41CD-B76A-C355F8FD5545}"/>
+              </a:ext>
+            </a:extLst>
+          </p:cNvPr>
+          <p:cNvSpPr txBox="1"/>
+          <p:nvPr/>
+        </p:nvSpPr>
+        <p:spPr>
+          <a:xfrm>
+            <a:off x="830565" y="5714129"/>
+            <a:ext cx="737702" cy="369332"/>
+          </a:xfrm>
+          <a:prstGeom prst="rect">
+            <a:avLst/>
+          </a:prstGeom>
+          <a:noFill/>
+        </p:spPr>
+        <p:txBody>
+          <a:bodyPr wrap="none" rtlCol="0">
+            <a:spAutoFit/>
+          </a:bodyPr>
+          <a:lstStyle/>
+          <a:p>
+            <a:r>
+              <a:rPr lang="en-US" altLang="ja-JP" b="1" dirty="0">
+                <a:solidFill>
+                  <a:srgbClr val="FF0000"/>
+                </a:solidFill>
+              </a:rPr>
+              <a:t>A</a:t>
+            </a:r>
+            <a:r>
+              <a:rPr lang="ja-JP" altLang="en-US" b="1" dirty="0"/>
+              <a:t>・</a:t>
+            </a:r>
+            <a:r>
+              <a:rPr lang="en-US" altLang="ja-JP" b="1" dirty="0">
+                <a:solidFill>
+                  <a:srgbClr val="00B050"/>
+                </a:solidFill>
+              </a:rPr>
+              <a:t>B</a:t>
+            </a:r>
+            <a:endParaRPr kumimoji="1" lang="en-US" altLang="ja-JP" dirty="0"/>
+          </a:p>
+        </p:txBody>
+      </p:sp>
+      <p:sp>
+        <p:nvSpPr>
+          <p:cNvPr id="27" name="テキスト ボックス 26">
+            <a:extLst>
+              <a:ext uri="{FF2B5EF4-FFF2-40B4-BE49-F238E27FC236}">
+                <a16:creationId xmlns:a16="http://schemas.microsoft.com/office/drawing/2014/main" id="{F253F70C-DD6A-43F5-B496-3148AE372269}"/>
+              </a:ext>
+            </a:extLst>
+          </p:cNvPr>
+          <p:cNvSpPr txBox="1"/>
+          <p:nvPr/>
+        </p:nvSpPr>
+        <p:spPr>
+          <a:xfrm>
+            <a:off x="830565" y="6116356"/>
+            <a:ext cx="737702" cy="369332"/>
+          </a:xfrm>
+          <a:prstGeom prst="rect">
+            <a:avLst/>
+          </a:prstGeom>
+          <a:noFill/>
+        </p:spPr>
+        <p:txBody>
+          <a:bodyPr wrap="none" rtlCol="0">
+            <a:spAutoFit/>
+          </a:bodyPr>
+          <a:lstStyle/>
+          <a:p>
+            <a:r>
+              <a:rPr lang="en-US" altLang="ja-JP" b="1" dirty="0">
+                <a:solidFill>
+                  <a:srgbClr val="0070C0"/>
+                </a:solidFill>
+              </a:rPr>
+              <a:t>C</a:t>
+            </a:r>
+            <a:r>
+              <a:rPr lang="ja-JP" altLang="en-US" b="1" dirty="0"/>
+              <a:t>・</a:t>
+            </a:r>
+            <a:r>
+              <a:rPr lang="en-US" altLang="ja-JP" b="1" dirty="0">
+                <a:solidFill>
+                  <a:srgbClr val="00B050"/>
+                </a:solidFill>
+              </a:rPr>
+              <a:t>B</a:t>
+            </a:r>
+            <a:endParaRPr kumimoji="1" lang="en-US" altLang="ja-JP" dirty="0"/>
+          </a:p>
+        </p:txBody>
+      </p:sp>
+      <p:sp>
+        <p:nvSpPr>
+          <p:cNvPr id="28" name="テキスト ボックス 27">
+            <a:extLst>
+              <a:ext uri="{FF2B5EF4-FFF2-40B4-BE49-F238E27FC236}">
+                <a16:creationId xmlns:a16="http://schemas.microsoft.com/office/drawing/2014/main" id="{2CEBA607-23D7-4436-906F-7B669C344ABD}"/>
+              </a:ext>
+            </a:extLst>
+          </p:cNvPr>
+          <p:cNvSpPr txBox="1"/>
+          <p:nvPr/>
+        </p:nvSpPr>
+        <p:spPr>
+          <a:xfrm>
+            <a:off x="6096000" y="5898795"/>
+            <a:ext cx="4493538" cy="461665"/>
+          </a:xfrm>
+          <a:prstGeom prst="rect">
+            <a:avLst/>
+          </a:prstGeom>
+          <a:noFill/>
+        </p:spPr>
+        <p:txBody>
+          <a:bodyPr wrap="none" rtlCol="0">
+            <a:spAutoFit/>
+          </a:bodyPr>
+          <a:lstStyle/>
+          <a:p>
+            <a:r>
+              <a:rPr lang="ja-JP" altLang="en-US" sz="2400" b="1" dirty="0">
+                <a:solidFill>
+                  <a:srgbClr val="FF0000"/>
+                </a:solidFill>
+              </a:rPr>
+              <a:t>ただし問題点が１つあります。</a:t>
+            </a:r>
+            <a:endParaRPr lang="en-US" altLang="ja-JP" sz="2400" b="1" dirty="0">
+              <a:solidFill>
+                <a:srgbClr val="FF0000"/>
+              </a:solidFill>
+            </a:endParaRPr>
+          </a:p>
+        </p:txBody>
+      </p:sp>
+    </p:spTree>
+    <p:extLst>
+      <p:ext uri="{BB962C8B-B14F-4D97-AF65-F5344CB8AC3E}">
+        <p14:creationId xmlns:p14="http://schemas.microsoft.com/office/powerpoint/2010/main" val="2816949584"/>
+      </p:ext>
+    </p:extLst>
+  </p:cSld>
+  <p:clrMapOvr>
+    <a:masterClrMapping/>
+  </p:clrMapOvr>
+</p:sld>
+</file>
+
+<file path=ppt/slides/slide7.xml><?xml version="1.0" encoding="utf-8"?>
+<p:sld xmlns:a="http://schemas.openxmlformats.org/drawingml/2006/main" xmlns:r="http://schemas.openxmlformats.org/officeDocument/2006/relationships" xmlns:p="http://schemas.openxmlformats.org/presentationml/2006/main">
+  <p:cSld>
+    <p:spTree>
+      <p:nvGrpSpPr>
+        <p:cNvPr id="1" name=""/>
+        <p:cNvGrpSpPr/>
+        <p:nvPr/>
+      </p:nvGrpSpPr>
+      <p:grpSpPr>
+        <a:xfrm>
+          <a:off x="0" y="0"/>
+          <a:ext cx="0" cy="0"/>
+          <a:chOff x="0" y="0"/>
+          <a:chExt cx="0" cy="0"/>
+        </a:xfrm>
+      </p:grpSpPr>
+      <p:sp>
+        <p:nvSpPr>
+          <p:cNvPr id="4" name="テキスト ボックス 3">
+            <a:extLst>
+              <a:ext uri="{FF2B5EF4-FFF2-40B4-BE49-F238E27FC236}">
+                <a16:creationId xmlns:a16="http://schemas.microsoft.com/office/drawing/2014/main" id="{5A13BF46-B8C5-48AA-8308-C9ECFF431A18}"/>
+              </a:ext>
+            </a:extLst>
+          </p:cNvPr>
+          <p:cNvSpPr txBox="1"/>
+          <p:nvPr/>
+        </p:nvSpPr>
+        <p:spPr>
+          <a:xfrm>
+            <a:off x="567542" y="491954"/>
+            <a:ext cx="3584636" cy="584775"/>
+          </a:xfrm>
+          <a:prstGeom prst="rect">
+            <a:avLst/>
+          </a:prstGeom>
+          <a:noFill/>
+        </p:spPr>
+        <p:txBody>
+          <a:bodyPr wrap="none" rtlCol="0">
+            <a:spAutoFit/>
+          </a:bodyPr>
+          <a:lstStyle/>
+          <a:p>
+            <a:r>
+              <a:rPr kumimoji="1" lang="ja-JP" altLang="en-US" sz="3200" b="1" u="sng" dirty="0"/>
+              <a:t>視野角判定 仕組み</a:t>
+            </a:r>
+          </a:p>
+        </p:txBody>
+      </p:sp>
+      <p:sp>
+        <p:nvSpPr>
+          <p:cNvPr id="6" name="テキスト ボックス 5">
+            <a:extLst>
+              <a:ext uri="{FF2B5EF4-FFF2-40B4-BE49-F238E27FC236}">
+                <a16:creationId xmlns:a16="http://schemas.microsoft.com/office/drawing/2014/main" id="{55830AD6-028B-4C4E-80BF-B70DFC1C3A46}"/>
+              </a:ext>
+            </a:extLst>
+          </p:cNvPr>
+          <p:cNvSpPr txBox="1"/>
+          <p:nvPr/>
+        </p:nvSpPr>
+        <p:spPr>
+          <a:xfrm>
+            <a:off x="567542" y="1216429"/>
+            <a:ext cx="8408071" cy="830997"/>
+          </a:xfrm>
+          <a:prstGeom prst="rect">
+            <a:avLst/>
+          </a:prstGeom>
+          <a:noFill/>
+        </p:spPr>
+        <p:txBody>
+          <a:bodyPr wrap="none" rtlCol="0">
+            <a:spAutoFit/>
+          </a:bodyPr>
+          <a:lstStyle/>
+          <a:p>
+            <a:r>
+              <a:rPr kumimoji="1" lang="ja-JP" altLang="en-US" sz="2400" b="1" dirty="0">
+                <a:solidFill>
+                  <a:srgbClr val="0070C0"/>
+                </a:solidFill>
+              </a:rPr>
+              <a:t>視野角に沿ったベクトル</a:t>
+            </a:r>
+            <a:r>
+              <a:rPr lang="en-US" altLang="ja-JP" sz="2400" b="1" dirty="0">
+                <a:solidFill>
+                  <a:srgbClr val="0070C0"/>
+                </a:solidFill>
+              </a:rPr>
+              <a:t>C</a:t>
+            </a:r>
+            <a:r>
+              <a:rPr lang="ja-JP" altLang="en-US" sz="2400" dirty="0"/>
+              <a:t>がいくつなのかが分かりません。</a:t>
+            </a:r>
+            <a:endParaRPr lang="en-US" altLang="ja-JP" sz="2400" dirty="0"/>
+          </a:p>
+          <a:p>
+            <a:r>
+              <a:rPr kumimoji="1" lang="ja-JP" altLang="en-US" sz="2400" dirty="0"/>
+              <a:t>なので</a:t>
+            </a:r>
+            <a:r>
+              <a:rPr lang="en-US" altLang="ja-JP" sz="2400" b="1" dirty="0">
+                <a:solidFill>
+                  <a:srgbClr val="0070C0"/>
+                </a:solidFill>
+              </a:rPr>
+              <a:t>C</a:t>
+            </a:r>
+            <a:r>
+              <a:rPr lang="ja-JP" altLang="en-US" sz="2400" b="1" dirty="0"/>
+              <a:t>・</a:t>
+            </a:r>
+            <a:r>
+              <a:rPr lang="en-US" altLang="ja-JP" sz="2400" b="1" dirty="0">
+                <a:solidFill>
+                  <a:srgbClr val="00B050"/>
+                </a:solidFill>
+              </a:rPr>
+              <a:t>B</a:t>
+            </a:r>
+            <a:r>
+              <a:rPr lang="ja-JP" altLang="en-US" sz="2400" dirty="0"/>
+              <a:t>は</a:t>
+            </a:r>
+            <a:r>
+              <a:rPr lang="ja-JP" altLang="en-US" sz="2400" b="1" dirty="0">
+                <a:solidFill>
+                  <a:srgbClr val="FF0000"/>
+                </a:solidFill>
+              </a:rPr>
+              <a:t>もう一つの内積の計算</a:t>
+            </a:r>
+            <a:r>
+              <a:rPr lang="ja-JP" altLang="en-US" sz="2400" dirty="0"/>
+              <a:t>で求めます。</a:t>
+            </a:r>
+            <a:endParaRPr kumimoji="1" lang="en-US" altLang="ja-JP" sz="2400" dirty="0"/>
+          </a:p>
+        </p:txBody>
+      </p:sp>
+      <p:pic>
+        <p:nvPicPr>
+          <p:cNvPr id="7" name="図 6">
+            <a:extLst>
+              <a:ext uri="{FF2B5EF4-FFF2-40B4-BE49-F238E27FC236}">
+                <a16:creationId xmlns:a16="http://schemas.microsoft.com/office/drawing/2014/main" id="{A6CA6E71-1755-4677-86B3-8009562964FB}"/>
+              </a:ext>
+            </a:extLst>
+          </p:cNvPr>
+          <p:cNvPicPr>
+            <a:picLocks noChangeAspect="1"/>
+          </p:cNvPicPr>
+          <p:nvPr/>
+        </p:nvPicPr>
+        <p:blipFill>
+          <a:blip r:embed="rId2">
+            <a:extLst>
+              <a:ext uri="{28A0092B-C50C-407E-A947-70E740481C1C}">
+                <a14:useLocalDpi xmlns:a14="http://schemas.microsoft.com/office/drawing/2010/main" val="0"/>
+              </a:ext>
+            </a:extLst>
+          </a:blip>
+          <a:stretch>
+            <a:fillRect/>
+          </a:stretch>
+        </p:blipFill>
+        <p:spPr>
+          <a:xfrm>
+            <a:off x="3536389" y="4631205"/>
+            <a:ext cx="544265" cy="1088530"/>
+          </a:xfrm>
+          <a:prstGeom prst="rect">
+            <a:avLst/>
+          </a:prstGeom>
+        </p:spPr>
+      </p:pic>
+      <p:pic>
+        <p:nvPicPr>
+          <p:cNvPr id="8" name="図 7">
+            <a:extLst>
+              <a:ext uri="{FF2B5EF4-FFF2-40B4-BE49-F238E27FC236}">
+                <a16:creationId xmlns:a16="http://schemas.microsoft.com/office/drawing/2014/main" id="{EF181451-BD0B-49FC-A7D6-75A57F024189}"/>
+              </a:ext>
+            </a:extLst>
+          </p:cNvPr>
+          <p:cNvPicPr>
+            <a:picLocks noChangeAspect="1"/>
+          </p:cNvPicPr>
+          <p:nvPr/>
+        </p:nvPicPr>
+        <p:blipFill>
+          <a:blip r:embed="rId3">
+            <a:extLst>
+              <a:ext uri="{28A0092B-C50C-407E-A947-70E740481C1C}">
+                <a14:useLocalDpi xmlns:a14="http://schemas.microsoft.com/office/drawing/2010/main" val="0"/>
+              </a:ext>
+            </a:extLst>
+          </a:blip>
+          <a:stretch>
+            <a:fillRect/>
+          </a:stretch>
+        </p:blipFill>
+        <p:spPr>
+          <a:xfrm>
+            <a:off x="850536" y="3672951"/>
+            <a:ext cx="720931" cy="720931"/>
+          </a:xfrm>
+          <a:prstGeom prst="rect">
+            <a:avLst/>
+          </a:prstGeom>
+        </p:spPr>
+      </p:pic>
+      <p:sp>
+        <p:nvSpPr>
+          <p:cNvPr id="5" name="部分円 4">
+            <a:extLst>
+              <a:ext uri="{FF2B5EF4-FFF2-40B4-BE49-F238E27FC236}">
+                <a16:creationId xmlns:a16="http://schemas.microsoft.com/office/drawing/2014/main" id="{E6EB77CC-532F-44BA-93D9-BAF9AD41226D}"/>
+              </a:ext>
+            </a:extLst>
+          </p:cNvPr>
+          <p:cNvSpPr/>
+          <p:nvPr/>
+        </p:nvSpPr>
+        <p:spPr>
+          <a:xfrm rot="9024398">
+            <a:off x="-1315418" y="1333416"/>
+            <a:ext cx="5400000" cy="5400000"/>
+          </a:xfrm>
+          <a:prstGeom prst="pie">
+            <a:avLst>
+              <a:gd name="adj1" fmla="val 10273235"/>
+              <a:gd name="adj2" fmla="val 14667644"/>
+            </a:avLst>
+          </a:prstGeom>
+          <a:solidFill>
+            <a:srgbClr val="FF0000">
+              <a:alpha val="30196"/>
+            </a:srgbClr>
+          </a:solidFill>
+          <a:ln>
+            <a:noFill/>
+          </a:ln>
+        </p:spPr>
+        <p:style>
+          <a:lnRef idx="2">
+            <a:schemeClr val="accent1">
+              <a:shade val="50000"/>
+            </a:schemeClr>
+          </a:lnRef>
+          <a:fillRef idx="1">
+            <a:schemeClr val="accent1"/>
+          </a:fillRef>
+          <a:effectRef idx="0">
+            <a:schemeClr val="accent1"/>
+          </a:effectRef>
+          <a:fontRef idx="minor">
+            <a:schemeClr val="lt1"/>
+          </a:fontRef>
+        </p:style>
+        <p:txBody>
+          <a:bodyPr rtlCol="0" anchor="ctr"/>
+          <a:lstStyle/>
+          <a:p>
+            <a:pPr algn="ctr"/>
+            <a:endParaRPr kumimoji="1" lang="ja-JP" altLang="en-US">
+              <a:solidFill>
+                <a:schemeClr val="tx1"/>
+              </a:solidFill>
+            </a:endParaRPr>
+          </a:p>
+        </p:txBody>
+      </p:sp>
+      <p:cxnSp>
+        <p:nvCxnSpPr>
+          <p:cNvPr id="12" name="直線矢印コネクタ 11">
+            <a:extLst>
+              <a:ext uri="{FF2B5EF4-FFF2-40B4-BE49-F238E27FC236}">
+                <a16:creationId xmlns:a16="http://schemas.microsoft.com/office/drawing/2014/main" id="{41D64771-9E92-4E5D-8D2C-058B4DA587AA}"/>
+              </a:ext>
+            </a:extLst>
+          </p:cNvPr>
+          <p:cNvCxnSpPr>
+            <a:cxnSpLocks/>
+          </p:cNvCxnSpPr>
+          <p:nvPr/>
+        </p:nvCxnSpPr>
+        <p:spPr>
+          <a:xfrm>
+            <a:off x="1571467" y="4140993"/>
+            <a:ext cx="2053860" cy="570856"/>
+          </a:xfrm>
+          <a:prstGeom prst="straightConnector1">
+            <a:avLst/>
+          </a:prstGeom>
+          <a:ln w="38100">
+            <a:solidFill>
+              <a:srgbClr val="FF0000"/>
+            </a:solidFill>
+            <a:tailEnd type="triangle"/>
+          </a:ln>
+        </p:spPr>
+        <p:style>
+          <a:lnRef idx="1">
+            <a:schemeClr val="accent1"/>
+          </a:lnRef>
+          <a:fillRef idx="0">
+            <a:schemeClr val="accent1"/>
+          </a:fillRef>
+          <a:effectRef idx="0">
+            <a:schemeClr val="accent1"/>
+          </a:effectRef>
+          <a:fontRef idx="minor">
+            <a:schemeClr val="tx1"/>
+          </a:fontRef>
+        </p:style>
+      </p:cxnSp>
+      <p:cxnSp>
+        <p:nvCxnSpPr>
+          <p:cNvPr id="16" name="直線矢印コネクタ 15">
+            <a:extLst>
+              <a:ext uri="{FF2B5EF4-FFF2-40B4-BE49-F238E27FC236}">
+                <a16:creationId xmlns:a16="http://schemas.microsoft.com/office/drawing/2014/main" id="{603DD444-9285-40C8-B1B1-68E9316976E1}"/>
+              </a:ext>
+            </a:extLst>
+          </p:cNvPr>
+          <p:cNvCxnSpPr>
+            <a:cxnSpLocks/>
+          </p:cNvCxnSpPr>
+          <p:nvPr/>
+        </p:nvCxnSpPr>
+        <p:spPr>
+          <a:xfrm>
+            <a:off x="1568267" y="4033493"/>
+            <a:ext cx="529474" cy="0"/>
+          </a:xfrm>
+          <a:prstGeom prst="straightConnector1">
+            <a:avLst/>
+          </a:prstGeom>
+          <a:ln w="38100">
+            <a:solidFill>
+              <a:srgbClr val="00B050"/>
+            </a:solidFill>
+            <a:tailEnd type="triangle"/>
+          </a:ln>
+        </p:spPr>
+        <p:style>
+          <a:lnRef idx="1">
+            <a:schemeClr val="accent1"/>
+          </a:lnRef>
+          <a:fillRef idx="0">
+            <a:schemeClr val="accent1"/>
+          </a:fillRef>
+          <a:effectRef idx="0">
+            <a:schemeClr val="accent1"/>
+          </a:effectRef>
+          <a:fontRef idx="minor">
+            <a:schemeClr val="tx1"/>
+          </a:fontRef>
+        </p:style>
+      </p:cxnSp>
+      <p:cxnSp>
+        <p:nvCxnSpPr>
+          <p:cNvPr id="18" name="直線矢印コネクタ 17">
+            <a:extLst>
+              <a:ext uri="{FF2B5EF4-FFF2-40B4-BE49-F238E27FC236}">
+                <a16:creationId xmlns:a16="http://schemas.microsoft.com/office/drawing/2014/main" id="{2464F546-FF8D-4253-A40E-0B09B80B450B}"/>
+              </a:ext>
+            </a:extLst>
+          </p:cNvPr>
+          <p:cNvCxnSpPr>
+            <a:cxnSpLocks/>
+          </p:cNvCxnSpPr>
+          <p:nvPr/>
+        </p:nvCxnSpPr>
+        <p:spPr>
+          <a:xfrm flipV="1">
+            <a:off x="1568267" y="2312894"/>
+            <a:ext cx="1968122" cy="1604058"/>
+          </a:xfrm>
+          <a:prstGeom prst="straightConnector1">
+            <a:avLst/>
+          </a:prstGeom>
+          <a:ln w="76200">
+            <a:solidFill>
+              <a:srgbClr val="0070C0"/>
+            </a:solidFill>
+            <a:tailEnd type="triangle"/>
+          </a:ln>
+        </p:spPr>
+        <p:style>
+          <a:lnRef idx="1">
+            <a:schemeClr val="accent1"/>
+          </a:lnRef>
+          <a:fillRef idx="0">
+            <a:schemeClr val="accent1"/>
+          </a:fillRef>
+          <a:effectRef idx="0">
+            <a:schemeClr val="accent1"/>
+          </a:effectRef>
+          <a:fontRef idx="minor">
+            <a:schemeClr val="tx1"/>
+          </a:fontRef>
+        </p:style>
+      </p:cxnSp>
+    </p:spTree>
+    <p:extLst>
+      <p:ext uri="{BB962C8B-B14F-4D97-AF65-F5344CB8AC3E}">
+        <p14:creationId xmlns:p14="http://schemas.microsoft.com/office/powerpoint/2010/main" val="406102563"/>
+      </p:ext>
+    </p:extLst>
+  </p:cSld>
+  <p:clrMapOvr>
+    <a:masterClrMapping/>
+  </p:clrMapOvr>
+</p:sld>
+</file>
+
+<file path=ppt/slides/slide8.xml><?xml version="1.0" encoding="utf-8"?>
+<p:sld xmlns:a="http://schemas.openxmlformats.org/drawingml/2006/main" xmlns:r="http://schemas.openxmlformats.org/officeDocument/2006/relationships" xmlns:p="http://schemas.openxmlformats.org/presentationml/2006/main">
+  <p:cSld>
+    <p:spTree>
+      <p:nvGrpSpPr>
+        <p:cNvPr id="1" name=""/>
+        <p:cNvGrpSpPr/>
+        <p:nvPr/>
+      </p:nvGrpSpPr>
+      <p:grpSpPr>
+        <a:xfrm>
+          <a:off x="0" y="0"/>
+          <a:ext cx="0" cy="0"/>
+          <a:chOff x="0" y="0"/>
+          <a:chExt cx="0" cy="0"/>
+        </a:xfrm>
+      </p:grpSpPr>
+      <p:sp>
+        <p:nvSpPr>
+          <p:cNvPr id="4" name="テキスト ボックス 3">
+            <a:extLst>
+              <a:ext uri="{FF2B5EF4-FFF2-40B4-BE49-F238E27FC236}">
+                <a16:creationId xmlns:a16="http://schemas.microsoft.com/office/drawing/2014/main" id="{5A13BF46-B8C5-48AA-8308-C9ECFF431A18}"/>
+              </a:ext>
+            </a:extLst>
+          </p:cNvPr>
+          <p:cNvSpPr txBox="1"/>
+          <p:nvPr/>
+        </p:nvSpPr>
+        <p:spPr>
+          <a:xfrm>
+            <a:off x="567542" y="491954"/>
+            <a:ext cx="3584636" cy="584775"/>
+          </a:xfrm>
+          <a:prstGeom prst="rect">
+            <a:avLst/>
+          </a:prstGeom>
+          <a:noFill/>
+        </p:spPr>
+        <p:txBody>
+          <a:bodyPr wrap="none" rtlCol="0">
+            <a:spAutoFit/>
+          </a:bodyPr>
+          <a:lstStyle/>
+          <a:p>
+            <a:r>
+              <a:rPr kumimoji="1" lang="ja-JP" altLang="en-US" sz="3200" b="1" u="sng" dirty="0"/>
+              <a:t>視野角判定 仕組み</a:t>
+            </a:r>
+          </a:p>
+        </p:txBody>
+      </p:sp>
+      <mc:AlternateContent xmlns:mc="http://schemas.openxmlformats.org/markup-compatibility/2006">
+        <mc:Choice xmlns:a14="http://schemas.microsoft.com/office/drawing/2010/main" Requires="a14">
+          <p:sp>
+            <p:nvSpPr>
+              <p:cNvPr id="6" name="テキスト ボックス 5">
+                <a:extLst>
+                  <a:ext uri="{FF2B5EF4-FFF2-40B4-BE49-F238E27FC236}">
+                    <a16:creationId xmlns:a16="http://schemas.microsoft.com/office/drawing/2014/main" id="{55830AD6-028B-4C4E-80BF-B70DFC1C3A46}"/>
+                  </a:ext>
+                </a:extLst>
+              </p:cNvPr>
+              <p:cNvSpPr txBox="1"/>
+              <p:nvPr/>
+            </p:nvSpPr>
+            <p:spPr>
+              <a:xfrm>
+                <a:off x="567542" y="1216429"/>
+                <a:ext cx="9110186" cy="2677656"/>
+              </a:xfrm>
+              <a:prstGeom prst="rect">
+                <a:avLst/>
+              </a:prstGeom>
+              <a:noFill/>
+            </p:spPr>
+            <p:txBody>
+              <a:bodyPr wrap="none" rtlCol="0">
+                <a:spAutoFit/>
+              </a:bodyPr>
+              <a:lstStyle/>
+              <a:p>
+                <a:r>
+                  <a:rPr kumimoji="1" lang="ja-JP" altLang="en-US" sz="2400" dirty="0"/>
+                  <a:t>内積は以下の方法でも計算できます。</a:t>
+                </a:r>
+                <a:endParaRPr kumimoji="1" lang="en-US" altLang="ja-JP" sz="2400" dirty="0"/>
+              </a:p>
+              <a:p>
+                <a:endParaRPr lang="en-US" altLang="ja-JP" sz="2400" dirty="0"/>
+              </a:p>
+              <a:p>
+                <a:r>
+                  <a:rPr kumimoji="1" lang="ja-JP" altLang="en-US" sz="2400" b="1" dirty="0">
+                    <a:solidFill>
+                      <a:srgbClr val="FF0000"/>
+                    </a:solidFill>
+                  </a:rPr>
+                  <a:t>■ベクトルの長さと</a:t>
+                </a:r>
+                <a14:m>
+                  <m:oMath xmlns:m="http://schemas.openxmlformats.org/officeDocument/2006/math">
+                    <m:r>
+                      <a:rPr kumimoji="1" lang="en-US" altLang="ja-JP" sz="2400" b="1" i="1" smtClean="0">
+                        <a:solidFill>
+                          <a:srgbClr val="FF0000"/>
+                        </a:solidFill>
+                        <a:latin typeface="Cambria Math" panose="02040503050406030204" pitchFamily="18" charset="0"/>
+                      </a:rPr>
+                      <m:t>𝒄𝒐𝒔</m:t>
+                    </m:r>
+                  </m:oMath>
+                </a14:m>
+                <a:r>
+                  <a:rPr kumimoji="1" lang="ja-JP" altLang="en-US" sz="2400" b="1" dirty="0">
+                    <a:solidFill>
+                      <a:srgbClr val="FF0000"/>
+                    </a:solidFill>
+                  </a:rPr>
+                  <a:t>を使った内積</a:t>
+                </a:r>
+                <a:endParaRPr kumimoji="1" lang="en-US" altLang="ja-JP" sz="2400" b="1" dirty="0">
+                  <a:solidFill>
+                    <a:srgbClr val="FF0000"/>
+                  </a:solidFill>
+                </a:endParaRPr>
+              </a:p>
+              <a:p>
+                <a14:m>
+                  <m:oMath xmlns:m="http://schemas.openxmlformats.org/officeDocument/2006/math">
+                    <m:r>
+                      <a:rPr lang="ja-JP" altLang="en-US" sz="2400" b="0" i="1" dirty="0">
+                        <a:latin typeface="Cambria Math" panose="02040503050406030204" pitchFamily="18" charset="0"/>
+                      </a:rPr>
+                      <m:t>ベクトル</m:t>
+                    </m:r>
+                    <m:r>
+                      <a:rPr lang="en-US" altLang="ja-JP" sz="2400" b="0" i="1" dirty="0" smtClean="0">
+                        <a:latin typeface="Cambria Math" panose="02040503050406030204" pitchFamily="18" charset="0"/>
+                      </a:rPr>
+                      <m:t>𝐴</m:t>
+                    </m:r>
+                    <m:r>
+                      <a:rPr lang="en-US" altLang="ja-JP" sz="2400" b="0" i="1" dirty="0" smtClean="0">
+                        <a:latin typeface="Cambria Math" panose="02040503050406030204" pitchFamily="18" charset="0"/>
+                      </a:rPr>
+                      <m:t>,</m:t>
+                    </m:r>
+                    <m:r>
+                      <a:rPr lang="en-US" altLang="ja-JP" sz="2400" b="0" i="1" dirty="0" smtClean="0">
+                        <a:latin typeface="Cambria Math" panose="02040503050406030204" pitchFamily="18" charset="0"/>
+                      </a:rPr>
+                      <m:t>𝐵</m:t>
+                    </m:r>
+                  </m:oMath>
+                </a14:m>
+                <a:r>
+                  <a:rPr kumimoji="1" lang="ja-JP" altLang="en-US" sz="2400" dirty="0"/>
+                  <a:t>と</a:t>
+                </a:r>
+                <a14:m>
+                  <m:oMath xmlns:m="http://schemas.openxmlformats.org/officeDocument/2006/math">
+                    <m:r>
+                      <a:rPr lang="en-US" altLang="ja-JP" sz="2400" i="1" dirty="0">
+                        <a:latin typeface="Cambria Math" panose="02040503050406030204" pitchFamily="18" charset="0"/>
+                      </a:rPr>
+                      <m:t>𝐴</m:t>
+                    </m:r>
+                    <m:r>
+                      <a:rPr lang="en-US" altLang="ja-JP" sz="2400" i="1" dirty="0">
+                        <a:latin typeface="Cambria Math" panose="02040503050406030204" pitchFamily="18" charset="0"/>
+                      </a:rPr>
+                      <m:t>,</m:t>
+                    </m:r>
+                    <m:r>
+                      <a:rPr lang="en-US" altLang="ja-JP" sz="2400" i="1" dirty="0">
+                        <a:latin typeface="Cambria Math" panose="02040503050406030204" pitchFamily="18" charset="0"/>
+                      </a:rPr>
+                      <m:t>𝐵</m:t>
+                    </m:r>
+                    <m:r>
+                      <a:rPr lang="ja-JP" altLang="en-US" sz="2400" i="1" dirty="0" smtClean="0">
+                        <a:latin typeface="Cambria Math" panose="02040503050406030204" pitchFamily="18" charset="0"/>
+                      </a:rPr>
+                      <m:t>が</m:t>
+                    </m:r>
+                  </m:oMath>
+                </a14:m>
+                <a:r>
+                  <a:rPr kumimoji="1" lang="ja-JP" altLang="en-US" sz="2400" dirty="0"/>
+                  <a:t>なす角を</a:t>
+                </a:r>
+                <a14:m>
+                  <m:oMath xmlns:m="http://schemas.openxmlformats.org/officeDocument/2006/math">
+                    <m:r>
+                      <m:rPr>
+                        <m:sty m:val="p"/>
+                      </m:rPr>
+                      <a:rPr lang="en-US" altLang="ja-JP" sz="2400" i="1">
+                        <a:latin typeface="Cambria Math" panose="02040503050406030204" pitchFamily="18" charset="0"/>
+                      </a:rPr>
+                      <m:t>θ</m:t>
+                    </m:r>
+                  </m:oMath>
+                </a14:m>
+                <a:r>
+                  <a:rPr kumimoji="1" lang="ja-JP" altLang="en-US" sz="2400" dirty="0"/>
+                  <a:t>としたとき、</a:t>
+                </a:r>
+                <a:endParaRPr kumimoji="1" lang="en-US" altLang="ja-JP" sz="2400" dirty="0"/>
+              </a:p>
+              <a:p>
+                <a:pPr/>
+                <a14:m>
+                  <m:oMath xmlns:m="http://schemas.openxmlformats.org/officeDocument/2006/math">
+                    <m:r>
+                      <a:rPr lang="en-US" altLang="ja-JP" sz="2400" b="1" i="1">
+                        <a:solidFill>
+                          <a:srgbClr val="FF0000"/>
+                        </a:solidFill>
+                        <a:latin typeface="Cambria Math" panose="02040503050406030204" pitchFamily="18" charset="0"/>
+                      </a:rPr>
+                      <m:t>𝑨</m:t>
+                    </m:r>
+                    <m:r>
+                      <a:rPr lang="ja-JP" altLang="en-US" sz="2400" b="1" i="1" smtClean="0">
+                        <a:solidFill>
+                          <a:srgbClr val="FF0000"/>
+                        </a:solidFill>
+                        <a:latin typeface="Cambria Math" panose="02040503050406030204" pitchFamily="18" charset="0"/>
+                      </a:rPr>
+                      <m:t>・</m:t>
+                    </m:r>
+                    <m:r>
+                      <a:rPr lang="en-US" altLang="ja-JP" sz="2400" b="1" i="1" smtClean="0">
+                        <a:solidFill>
+                          <a:srgbClr val="FF0000"/>
+                        </a:solidFill>
+                        <a:latin typeface="Cambria Math" panose="02040503050406030204" pitchFamily="18" charset="0"/>
+                      </a:rPr>
+                      <m:t>𝑩</m:t>
+                    </m:r>
+                    <m:r>
+                      <a:rPr lang="en-US" altLang="ja-JP" sz="2400" b="1" i="1" smtClean="0">
+                        <a:solidFill>
+                          <a:srgbClr val="FF0000"/>
+                        </a:solidFill>
+                        <a:latin typeface="Cambria Math" panose="02040503050406030204" pitchFamily="18" charset="0"/>
+                      </a:rPr>
+                      <m:t>=||</m:t>
+                    </m:r>
+                    <m:r>
+                      <a:rPr lang="en-US" altLang="ja-JP" sz="2400" b="1" i="1" smtClean="0">
+                        <a:solidFill>
+                          <a:srgbClr val="FF0000"/>
+                        </a:solidFill>
+                        <a:latin typeface="Cambria Math" panose="02040503050406030204" pitchFamily="18" charset="0"/>
+                      </a:rPr>
+                      <m:t>𝑨</m:t>
+                    </m:r>
+                    <m:r>
+                      <a:rPr lang="en-US" altLang="ja-JP" sz="2400" b="1" i="1" smtClean="0">
+                        <a:solidFill>
+                          <a:srgbClr val="FF0000"/>
+                        </a:solidFill>
+                        <a:latin typeface="Cambria Math" panose="02040503050406030204" pitchFamily="18" charset="0"/>
+                      </a:rPr>
+                      <m:t>||×||</m:t>
+                    </m:r>
+                    <m:r>
+                      <a:rPr lang="en-US" altLang="ja-JP" sz="2400" b="1" i="1" smtClean="0">
+                        <a:solidFill>
+                          <a:srgbClr val="FF0000"/>
+                        </a:solidFill>
+                        <a:latin typeface="Cambria Math" panose="02040503050406030204" pitchFamily="18" charset="0"/>
+                      </a:rPr>
+                      <m:t>𝑩</m:t>
+                    </m:r>
+                    <m:r>
+                      <a:rPr lang="en-US" altLang="ja-JP" sz="2400" b="1" i="1" smtClean="0">
+                        <a:solidFill>
+                          <a:srgbClr val="FF0000"/>
+                        </a:solidFill>
+                        <a:latin typeface="Cambria Math" panose="02040503050406030204" pitchFamily="18" charset="0"/>
+                      </a:rPr>
+                      <m:t>||×</m:t>
+                    </m:r>
+                    <m:r>
+                      <a:rPr lang="en-US" altLang="ja-JP" sz="2400" b="1" i="0" smtClean="0">
+                        <a:solidFill>
+                          <a:srgbClr val="FF0000"/>
+                        </a:solidFill>
+                        <a:latin typeface="Cambria Math" panose="02040503050406030204" pitchFamily="18" charset="0"/>
+                      </a:rPr>
+                      <m:t>𝐜𝐨𝐬</m:t>
+                    </m:r>
+                    <m:r>
+                      <a:rPr lang="en-US" altLang="ja-JP" sz="2400" b="1" i="1" smtClean="0">
+                        <a:solidFill>
+                          <a:srgbClr val="FF0000"/>
+                        </a:solidFill>
+                        <a:latin typeface="Cambria Math" panose="02040503050406030204" pitchFamily="18" charset="0"/>
+                      </a:rPr>
+                      <m:t>⁡(</m:t>
+                    </m:r>
+                    <m:r>
+                      <a:rPr lang="en-US" altLang="ja-JP" sz="2400" b="1" i="1">
+                        <a:solidFill>
+                          <a:srgbClr val="FF0000"/>
+                        </a:solidFill>
+                        <a:latin typeface="Cambria Math" panose="02040503050406030204" pitchFamily="18" charset="0"/>
+                      </a:rPr>
+                      <m:t>𝜽</m:t>
+                    </m:r>
+                    <m:r>
+                      <a:rPr lang="en-US" altLang="ja-JP" sz="2400" b="1" i="1" smtClean="0">
+                        <a:solidFill>
+                          <a:srgbClr val="FF0000"/>
+                        </a:solidFill>
+                        <a:latin typeface="Cambria Math" panose="02040503050406030204" pitchFamily="18" charset="0"/>
+                      </a:rPr>
+                      <m:t>)</m:t>
+                    </m:r>
+                  </m:oMath>
+                </a14:m>
+                <a:r>
+                  <a:rPr kumimoji="1" lang="en-US" altLang="ja-JP" sz="2400" b="1" dirty="0">
+                    <a:solidFill>
+                      <a:srgbClr val="FF0000"/>
+                    </a:solidFill>
+                  </a:rPr>
+                  <a:t> </a:t>
+                </a:r>
+                <a:r>
+                  <a:rPr kumimoji="1" lang="ja-JP" altLang="en-US" sz="2400" dirty="0"/>
+                  <a:t>となる。</a:t>
+                </a:r>
+                <a:endParaRPr kumimoji="1" lang="en-US" altLang="ja-JP" sz="2400" dirty="0"/>
+              </a:p>
+              <a:p>
+                <a:pPr/>
+                <a:endParaRPr lang="en-US" altLang="ja-JP" sz="2400" dirty="0"/>
+              </a:p>
+              <a:p>
+                <a:pPr/>
+                <a:r>
+                  <a:rPr kumimoji="1" lang="ja-JP" altLang="en-US" sz="2400" dirty="0"/>
+                  <a:t>これで視野角に沿ったベクトルが分からなくても計算できます。</a:t>
+                </a:r>
+                <a:endParaRPr kumimoji="1" lang="en-US" altLang="ja-JP" sz="2400" dirty="0"/>
+              </a:p>
+            </p:txBody>
+          </p:sp>
+        </mc:Choice>
+        <mc:Fallback>
+          <p:sp>
+            <p:nvSpPr>
+              <p:cNvPr id="6" name="テキスト ボックス 5">
+                <a:extLst>
+                  <a:ext uri="{FF2B5EF4-FFF2-40B4-BE49-F238E27FC236}">
+                    <a16:creationId xmlns:a16="http://schemas.microsoft.com/office/drawing/2014/main" id="{55830AD6-028B-4C4E-80BF-B70DFC1C3A46}"/>
+                  </a:ext>
+                </a:extLst>
+              </p:cNvPr>
+              <p:cNvSpPr txBox="1">
+                <a:spLocks noRot="1" noChangeAspect="1" noMove="1" noResize="1" noEditPoints="1" noAdjustHandles="1" noChangeArrowheads="1" noChangeShapeType="1" noTextEdit="1"/>
+              </p:cNvSpPr>
+              <p:nvPr/>
+            </p:nvSpPr>
+            <p:spPr>
+              <a:xfrm>
+                <a:off x="567542" y="1216429"/>
+                <a:ext cx="9110186" cy="2677656"/>
+              </a:xfrm>
+              <a:prstGeom prst="rect">
+                <a:avLst/>
+              </a:prstGeom>
+              <a:blipFill>
+                <a:blip r:embed="rId2"/>
+                <a:stretch>
+                  <a:fillRect l="-1003" t="-1822" r="-67" b="-4328"/>
+                </a:stretch>
+              </a:blipFill>
+            </p:spPr>
+            <p:txBody>
+              <a:bodyPr/>
+              <a:lstStyle/>
+              <a:p>
+                <a:r>
+                  <a:rPr lang="ja-JP" altLang="en-US">
+                    <a:noFill/>
+                  </a:rPr>
+                  <a:t> </a:t>
+                </a:r>
+              </a:p>
+            </p:txBody>
+          </p:sp>
+        </mc:Fallback>
+      </mc:AlternateContent>
+    </p:spTree>
+    <p:extLst>
+      <p:ext uri="{BB962C8B-B14F-4D97-AF65-F5344CB8AC3E}">
+        <p14:creationId xmlns:p14="http://schemas.microsoft.com/office/powerpoint/2010/main" val="231737464"/>
+      </p:ext>
+    </p:extLst>
+  </p:cSld>
+  <p:clrMapOvr>
+    <a:masterClrMapping/>
+  </p:clrMapOvr>
+</p:sld>
+</file>
+
+<file path=ppt/slides/slide9.xml><?xml version="1.0" encoding="utf-8"?>
+<p:sld xmlns:a="http://schemas.openxmlformats.org/drawingml/2006/main" xmlns:r="http://schemas.openxmlformats.org/officeDocument/2006/relationships" xmlns:p="http://schemas.openxmlformats.org/presentationml/2006/main">
+  <p:cSld>
+    <p:spTree>
+      <p:nvGrpSpPr>
+        <p:cNvPr id="1" name=""/>
+        <p:cNvGrpSpPr/>
+        <p:nvPr/>
+      </p:nvGrpSpPr>
+      <p:grpSpPr>
+        <a:xfrm>
+          <a:off x="0" y="0"/>
+          <a:ext cx="0" cy="0"/>
+          <a:chOff x="0" y="0"/>
+          <a:chExt cx="0" cy="0"/>
+        </a:xfrm>
+      </p:grpSpPr>
+      <p:sp>
+        <p:nvSpPr>
+          <p:cNvPr id="4" name="テキスト ボックス 3">
+            <a:extLst>
+              <a:ext uri="{FF2B5EF4-FFF2-40B4-BE49-F238E27FC236}">
+                <a16:creationId xmlns:a16="http://schemas.microsoft.com/office/drawing/2014/main" id="{5A13BF46-B8C5-48AA-8308-C9ECFF431A18}"/>
+              </a:ext>
+            </a:extLst>
+          </p:cNvPr>
+          <p:cNvSpPr txBox="1"/>
+          <p:nvPr/>
+        </p:nvSpPr>
+        <p:spPr>
+          <a:xfrm>
+            <a:off x="567542" y="491954"/>
+            <a:ext cx="3584636" cy="584775"/>
+          </a:xfrm>
+          <a:prstGeom prst="rect">
+            <a:avLst/>
+          </a:prstGeom>
+          <a:noFill/>
+        </p:spPr>
+        <p:txBody>
+          <a:bodyPr wrap="none" rtlCol="0">
+            <a:spAutoFit/>
+          </a:bodyPr>
+          <a:lstStyle/>
+          <a:p>
+            <a:r>
+              <a:rPr kumimoji="1" lang="ja-JP" altLang="en-US" sz="3200" b="1" u="sng" dirty="0"/>
+              <a:t>視野角判定 仕組み</a:t>
+            </a:r>
+          </a:p>
+        </p:txBody>
+      </p:sp>
+      <p:sp>
+        <p:nvSpPr>
+          <p:cNvPr id="6" name="テキスト ボックス 5">
+            <a:extLst>
+              <a:ext uri="{FF2B5EF4-FFF2-40B4-BE49-F238E27FC236}">
+                <a16:creationId xmlns:a16="http://schemas.microsoft.com/office/drawing/2014/main" id="{55830AD6-028B-4C4E-80BF-B70DFC1C3A46}"/>
+              </a:ext>
+            </a:extLst>
+          </p:cNvPr>
+          <p:cNvSpPr txBox="1"/>
+          <p:nvPr/>
+        </p:nvSpPr>
+        <p:spPr>
+          <a:xfrm>
+            <a:off x="567542" y="1216429"/>
+            <a:ext cx="10759677" cy="830997"/>
+          </a:xfrm>
+          <a:prstGeom prst="rect">
+            <a:avLst/>
+          </a:prstGeom>
+          <a:noFill/>
+        </p:spPr>
+        <p:txBody>
+          <a:bodyPr wrap="none" rtlCol="0">
+            <a:spAutoFit/>
+          </a:bodyPr>
+          <a:lstStyle/>
+          <a:p>
+            <a:r>
+              <a:rPr lang="ja-JP" altLang="en-US" sz="2400" b="1" dirty="0">
+                <a:solidFill>
+                  <a:srgbClr val="00B050"/>
+                </a:solidFill>
+              </a:rPr>
+              <a:t>ベクトル</a:t>
+            </a:r>
+            <a:r>
+              <a:rPr lang="en-US" altLang="ja-JP" sz="2400" b="1" dirty="0">
+                <a:solidFill>
+                  <a:srgbClr val="00B050"/>
+                </a:solidFill>
+              </a:rPr>
+              <a:t>B</a:t>
+            </a:r>
+            <a:r>
+              <a:rPr lang="ja-JP" altLang="en-US" sz="2400" dirty="0"/>
+              <a:t>は</a:t>
+            </a:r>
+            <a:r>
+              <a:rPr lang="ja-JP" altLang="en-US" sz="2400" b="1" dirty="0">
+                <a:solidFill>
+                  <a:srgbClr val="FF0000"/>
+                </a:solidFill>
+              </a:rPr>
+              <a:t>視野角のちょうど真ん中にまっすぐ伸びています。</a:t>
+            </a:r>
+            <a:endParaRPr lang="en-US" altLang="ja-JP" sz="2400" b="1" dirty="0">
+              <a:solidFill>
+                <a:srgbClr val="FF0000"/>
+              </a:solidFill>
+            </a:endParaRPr>
+          </a:p>
+          <a:p>
+            <a:r>
+              <a:rPr lang="ja-JP" altLang="en-US" sz="2400" dirty="0"/>
+              <a:t>つまり</a:t>
+            </a:r>
+            <a:r>
+              <a:rPr lang="ja-JP" altLang="en-US" sz="2400" b="1" dirty="0">
+                <a:solidFill>
+                  <a:srgbClr val="0070C0"/>
+                </a:solidFill>
+              </a:rPr>
+              <a:t>ベクトル</a:t>
+            </a:r>
+            <a:r>
+              <a:rPr lang="en-US" altLang="ja-JP" sz="2400" b="1" dirty="0">
+                <a:solidFill>
+                  <a:srgbClr val="0070C0"/>
+                </a:solidFill>
+              </a:rPr>
+              <a:t>C</a:t>
+            </a:r>
+            <a:r>
+              <a:rPr lang="ja-JP" altLang="en-US" sz="2400" dirty="0"/>
+              <a:t>と</a:t>
+            </a:r>
+            <a:r>
+              <a:rPr lang="ja-JP" altLang="en-US" sz="2400" b="1" dirty="0">
+                <a:solidFill>
+                  <a:srgbClr val="00B050"/>
+                </a:solidFill>
+              </a:rPr>
+              <a:t>ベクトル</a:t>
+            </a:r>
+            <a:r>
+              <a:rPr lang="en-US" altLang="ja-JP" sz="2400" b="1" dirty="0">
+                <a:solidFill>
+                  <a:srgbClr val="00B050"/>
+                </a:solidFill>
+              </a:rPr>
+              <a:t>B</a:t>
+            </a:r>
+            <a:r>
+              <a:rPr lang="ja-JP" altLang="en-US" sz="2400" dirty="0"/>
+              <a:t>のなす角は、</a:t>
+            </a:r>
+            <a:r>
+              <a:rPr lang="ja-JP" altLang="en-US" sz="2400" b="1" dirty="0">
+                <a:solidFill>
+                  <a:srgbClr val="FF0000"/>
+                </a:solidFill>
+              </a:rPr>
+              <a:t>視野角の半分の大きさ</a:t>
+            </a:r>
+            <a:r>
+              <a:rPr lang="ja-JP" altLang="en-US" sz="2400" dirty="0"/>
+              <a:t>となります</a:t>
+            </a:r>
+            <a:endParaRPr lang="en-US" altLang="ja-JP" sz="2400" dirty="0"/>
+          </a:p>
+        </p:txBody>
+      </p:sp>
+      <p:pic>
+        <p:nvPicPr>
+          <p:cNvPr id="7" name="図 6">
+            <a:extLst>
+              <a:ext uri="{FF2B5EF4-FFF2-40B4-BE49-F238E27FC236}">
+                <a16:creationId xmlns:a16="http://schemas.microsoft.com/office/drawing/2014/main" id="{A6CA6E71-1755-4677-86B3-8009562964FB}"/>
+              </a:ext>
+            </a:extLst>
+          </p:cNvPr>
+          <p:cNvPicPr>
+            <a:picLocks noChangeAspect="1"/>
+          </p:cNvPicPr>
+          <p:nvPr/>
+        </p:nvPicPr>
+        <p:blipFill>
+          <a:blip r:embed="rId2">
+            <a:extLst>
+              <a:ext uri="{28A0092B-C50C-407E-A947-70E740481C1C}">
+                <a14:useLocalDpi xmlns:a14="http://schemas.microsoft.com/office/drawing/2010/main" val="0"/>
+              </a:ext>
+            </a:extLst>
+          </a:blip>
+          <a:stretch>
+            <a:fillRect/>
+          </a:stretch>
+        </p:blipFill>
+        <p:spPr>
+          <a:xfrm>
+            <a:off x="3536389" y="4631205"/>
+            <a:ext cx="544265" cy="1088530"/>
+          </a:xfrm>
+          <a:prstGeom prst="rect">
+            <a:avLst/>
+          </a:prstGeom>
+        </p:spPr>
+      </p:pic>
+      <p:pic>
+        <p:nvPicPr>
+          <p:cNvPr id="8" name="図 7">
+            <a:extLst>
+              <a:ext uri="{FF2B5EF4-FFF2-40B4-BE49-F238E27FC236}">
+                <a16:creationId xmlns:a16="http://schemas.microsoft.com/office/drawing/2014/main" id="{EF181451-BD0B-49FC-A7D6-75A57F024189}"/>
+              </a:ext>
+            </a:extLst>
+          </p:cNvPr>
+          <p:cNvPicPr>
+            <a:picLocks noChangeAspect="1"/>
+          </p:cNvPicPr>
+          <p:nvPr/>
+        </p:nvPicPr>
+        <p:blipFill>
+          <a:blip r:embed="rId3">
+            <a:extLst>
+              <a:ext uri="{28A0092B-C50C-407E-A947-70E740481C1C}">
+                <a14:useLocalDpi xmlns:a14="http://schemas.microsoft.com/office/drawing/2010/main" val="0"/>
+              </a:ext>
+            </a:extLst>
+          </a:blip>
+          <a:stretch>
+            <a:fillRect/>
+          </a:stretch>
+        </p:blipFill>
+        <p:spPr>
+          <a:xfrm>
+            <a:off x="850536" y="3672951"/>
+            <a:ext cx="720931" cy="720931"/>
+          </a:xfrm>
+          <a:prstGeom prst="rect">
+            <a:avLst/>
+          </a:prstGeom>
+        </p:spPr>
+      </p:pic>
+      <p:sp>
+        <p:nvSpPr>
+          <p:cNvPr id="5" name="部分円 4">
+            <a:extLst>
+              <a:ext uri="{FF2B5EF4-FFF2-40B4-BE49-F238E27FC236}">
+                <a16:creationId xmlns:a16="http://schemas.microsoft.com/office/drawing/2014/main" id="{E6EB77CC-532F-44BA-93D9-BAF9AD41226D}"/>
+              </a:ext>
+            </a:extLst>
+          </p:cNvPr>
+          <p:cNvSpPr/>
+          <p:nvPr/>
+        </p:nvSpPr>
+        <p:spPr>
+          <a:xfrm rot="9024398">
+            <a:off x="-1315418" y="1333416"/>
+            <a:ext cx="5400000" cy="5400000"/>
+          </a:xfrm>
+          <a:prstGeom prst="pie">
+            <a:avLst>
+              <a:gd name="adj1" fmla="val 10273235"/>
+              <a:gd name="adj2" fmla="val 14667644"/>
+            </a:avLst>
+          </a:prstGeom>
+          <a:solidFill>
+            <a:srgbClr val="FF0000">
+              <a:alpha val="30196"/>
+            </a:srgbClr>
+          </a:solidFill>
+          <a:ln>
+            <a:noFill/>
+          </a:ln>
+        </p:spPr>
+        <p:style>
+          <a:lnRef idx="2">
+            <a:schemeClr val="accent1">
+              <a:shade val="50000"/>
+            </a:schemeClr>
+          </a:lnRef>
+          <a:fillRef idx="1">
+            <a:schemeClr val="accent1"/>
+          </a:fillRef>
+          <a:effectRef idx="0">
+            <a:schemeClr val="accent1"/>
+          </a:effectRef>
+          <a:fontRef idx="minor">
+            <a:schemeClr val="lt1"/>
+          </a:fontRef>
+        </p:style>
+        <p:txBody>
+          <a:bodyPr rtlCol="0" anchor="ctr"/>
+          <a:lstStyle/>
+          <a:p>
+            <a:pPr algn="ctr"/>
+            <a:endParaRPr kumimoji="1" lang="ja-JP" altLang="en-US">
+              <a:solidFill>
+                <a:schemeClr val="tx1"/>
+              </a:solidFill>
+            </a:endParaRPr>
+          </a:p>
+        </p:txBody>
+      </p:sp>
+      <p:cxnSp>
+        <p:nvCxnSpPr>
+          <p:cNvPr id="16" name="直線矢印コネクタ 15">
+            <a:extLst>
+              <a:ext uri="{FF2B5EF4-FFF2-40B4-BE49-F238E27FC236}">
+                <a16:creationId xmlns:a16="http://schemas.microsoft.com/office/drawing/2014/main" id="{603DD444-9285-40C8-B1B1-68E9316976E1}"/>
+              </a:ext>
+            </a:extLst>
+          </p:cNvPr>
+          <p:cNvCxnSpPr>
+            <a:cxnSpLocks/>
+          </p:cNvCxnSpPr>
+          <p:nvPr/>
+        </p:nvCxnSpPr>
+        <p:spPr>
+          <a:xfrm>
+            <a:off x="1568267" y="4033493"/>
+            <a:ext cx="529474" cy="0"/>
+          </a:xfrm>
+          <a:prstGeom prst="straightConnector1">
+            <a:avLst/>
+          </a:prstGeom>
+          <a:ln w="38100">
+            <a:solidFill>
+              <a:srgbClr val="00B050"/>
+            </a:solidFill>
+            <a:tailEnd type="triangle"/>
+          </a:ln>
+        </p:spPr>
+        <p:style>
+          <a:lnRef idx="1">
+            <a:schemeClr val="accent1"/>
+          </a:lnRef>
+          <a:fillRef idx="0">
+            <a:schemeClr val="accent1"/>
+          </a:fillRef>
+          <a:effectRef idx="0">
+            <a:schemeClr val="accent1"/>
+          </a:effectRef>
+          <a:fontRef idx="minor">
+            <a:schemeClr val="tx1"/>
+          </a:fontRef>
+        </p:style>
+      </p:cxnSp>
+      <p:cxnSp>
+        <p:nvCxnSpPr>
+          <p:cNvPr id="18" name="直線矢印コネクタ 17">
+            <a:extLst>
+              <a:ext uri="{FF2B5EF4-FFF2-40B4-BE49-F238E27FC236}">
+                <a16:creationId xmlns:a16="http://schemas.microsoft.com/office/drawing/2014/main" id="{2464F546-FF8D-4253-A40E-0B09B80B450B}"/>
+              </a:ext>
+            </a:extLst>
+          </p:cNvPr>
+          <p:cNvCxnSpPr>
+            <a:cxnSpLocks/>
+          </p:cNvCxnSpPr>
+          <p:nvPr/>
+        </p:nvCxnSpPr>
+        <p:spPr>
+          <a:xfrm flipV="1">
+            <a:off x="1568267" y="3606800"/>
+            <a:ext cx="336733" cy="310153"/>
+          </a:xfrm>
+          <a:prstGeom prst="straightConnector1">
+            <a:avLst/>
+          </a:prstGeom>
+          <a:ln w="38100">
+            <a:solidFill>
+              <a:srgbClr val="0070C0"/>
+            </a:solidFill>
+            <a:tailEnd type="triangle"/>
+          </a:ln>
+        </p:spPr>
+        <p:style>
+          <a:lnRef idx="1">
+            <a:schemeClr val="accent1"/>
+          </a:lnRef>
+          <a:fillRef idx="0">
+            <a:schemeClr val="accent1"/>
+          </a:fillRef>
+          <a:effectRef idx="0">
+            <a:schemeClr val="accent1"/>
+          </a:effectRef>
+          <a:fontRef idx="minor">
+            <a:schemeClr val="tx1"/>
+          </a:fontRef>
+        </p:style>
+      </p:cxnSp>
+      <p:sp>
+        <p:nvSpPr>
+          <p:cNvPr id="2" name="円弧 1">
+            <a:extLst>
+              <a:ext uri="{FF2B5EF4-FFF2-40B4-BE49-F238E27FC236}">
+                <a16:creationId xmlns:a16="http://schemas.microsoft.com/office/drawing/2014/main" id="{57BEAB52-6784-485C-A50E-088217DDD177}"/>
+              </a:ext>
+            </a:extLst>
+          </p:cNvPr>
+          <p:cNvSpPr/>
+          <p:nvPr/>
+        </p:nvSpPr>
+        <p:spPr>
+          <a:xfrm rot="1363339">
+            <a:off x="1248368" y="3836158"/>
+            <a:ext cx="529475" cy="720932"/>
+          </a:xfrm>
+          <a:prstGeom prst="arc">
+            <a:avLst>
+              <a:gd name="adj1" fmla="val 16200000"/>
+              <a:gd name="adj2" fmla="val 18497746"/>
+            </a:avLst>
+          </a:prstGeom>
+          <a:ln w="38100">
+            <a:solidFill>
+              <a:schemeClr val="tx1"/>
+            </a:solidFill>
+          </a:ln>
+        </p:spPr>
+        <p:style>
+          <a:lnRef idx="1">
+            <a:schemeClr val="accent1"/>
+          </a:lnRef>
+          <a:fillRef idx="0">
+            <a:schemeClr val="accent1"/>
+          </a:fillRef>
+          <a:effectRef idx="0">
+            <a:schemeClr val="accent1"/>
+          </a:effectRef>
+          <a:fontRef idx="minor">
+            <a:schemeClr val="tx1"/>
+          </a:fontRef>
+        </p:style>
+        <p:txBody>
+          <a:bodyPr rtlCol="0" anchor="ctr"/>
+          <a:lstStyle/>
+          <a:p>
+            <a:pPr algn="ctr"/>
+            <a:endParaRPr kumimoji="1" lang="ja-JP" altLang="en-US"/>
+          </a:p>
+        </p:txBody>
+      </p:sp>
+      <p:cxnSp>
+        <p:nvCxnSpPr>
+          <p:cNvPr id="10" name="直線コネクタ 9">
+            <a:extLst>
+              <a:ext uri="{FF2B5EF4-FFF2-40B4-BE49-F238E27FC236}">
+                <a16:creationId xmlns:a16="http://schemas.microsoft.com/office/drawing/2014/main" id="{87E244C2-95B4-4398-9B87-C72E667C23B1}"/>
+              </a:ext>
+            </a:extLst>
+          </p:cNvPr>
+          <p:cNvCxnSpPr/>
+          <p:nvPr/>
+        </p:nvCxnSpPr>
+        <p:spPr>
+          <a:xfrm>
+            <a:off x="1568267" y="4033416"/>
+            <a:ext cx="3901200" cy="0"/>
+          </a:xfrm>
+          <a:prstGeom prst="line">
+            <a:avLst/>
+          </a:prstGeom>
+          <a:ln>
+            <a:solidFill>
+              <a:srgbClr val="00B050"/>
+            </a:solidFill>
+            <a:prstDash val="dash"/>
+          </a:ln>
+        </p:spPr>
+        <p:style>
+          <a:lnRef idx="1">
+            <a:schemeClr val="accent1"/>
+          </a:lnRef>
+          <a:fillRef idx="0">
+            <a:schemeClr val="accent1"/>
+          </a:fillRef>
+          <a:effectRef idx="0">
+            <a:schemeClr val="accent1"/>
+          </a:effectRef>
+          <a:fontRef idx="minor">
+            <a:schemeClr val="tx1"/>
+          </a:fontRef>
+        </p:style>
+      </p:cxnSp>
+    </p:spTree>
+    <p:extLst>
+      <p:ext uri="{BB962C8B-B14F-4D97-AF65-F5344CB8AC3E}">
+        <p14:creationId xmlns:p14="http://schemas.microsoft.com/office/powerpoint/2010/main" val="2397878127"/>
       </p:ext>
     </p:extLst>
   </p:cSld>

--- a/ゲーム科1年/00_前期/ゲームプログラミングⅢ/ゲーム数学/実習/10_視野角判定.pptx
+++ b/ゲーム科1年/00_前期/ゲームプログラミングⅢ/ゲーム数学/実習/10_視野角判定.pptx
@@ -270,7 +270,7 @@
           <a:p>
             <a:fld id="{E9CC885B-4903-4D54-9A93-00025F12DED9}" type="datetimeFigureOut">
               <a:rPr kumimoji="1" lang="ja-JP" altLang="en-US" smtClean="0"/>
-              <a:t>2025/1/8</a:t>
+              <a:t>2025/3/14</a:t>
             </a:fld>
             <a:endParaRPr kumimoji="1" lang="ja-JP" altLang="en-US"/>
           </a:p>
@@ -500,7 +500,7 @@
           <a:p>
             <a:fld id="{E9CC885B-4903-4D54-9A93-00025F12DED9}" type="datetimeFigureOut">
               <a:rPr kumimoji="1" lang="ja-JP" altLang="en-US" smtClean="0"/>
-              <a:t>2025/1/8</a:t>
+              <a:t>2025/3/14</a:t>
             </a:fld>
             <a:endParaRPr kumimoji="1" lang="ja-JP" altLang="en-US"/>
           </a:p>
@@ -740,7 +740,7 @@
           <a:p>
             <a:fld id="{E9CC885B-4903-4D54-9A93-00025F12DED9}" type="datetimeFigureOut">
               <a:rPr kumimoji="1" lang="ja-JP" altLang="en-US" smtClean="0"/>
-              <a:t>2025/1/8</a:t>
+              <a:t>2025/3/14</a:t>
             </a:fld>
             <a:endParaRPr kumimoji="1" lang="ja-JP" altLang="en-US"/>
           </a:p>
@@ -970,7 +970,7 @@
           <a:p>
             <a:fld id="{E9CC885B-4903-4D54-9A93-00025F12DED9}" type="datetimeFigureOut">
               <a:rPr kumimoji="1" lang="ja-JP" altLang="en-US" smtClean="0"/>
-              <a:t>2025/1/8</a:t>
+              <a:t>2025/3/14</a:t>
             </a:fld>
             <a:endParaRPr kumimoji="1" lang="ja-JP" altLang="en-US"/>
           </a:p>
@@ -1245,7 +1245,7 @@
           <a:p>
             <a:fld id="{E9CC885B-4903-4D54-9A93-00025F12DED9}" type="datetimeFigureOut">
               <a:rPr kumimoji="1" lang="ja-JP" altLang="en-US" smtClean="0"/>
-              <a:t>2025/1/8</a:t>
+              <a:t>2025/3/14</a:t>
             </a:fld>
             <a:endParaRPr kumimoji="1" lang="ja-JP" altLang="en-US"/>
           </a:p>
@@ -1574,7 +1574,7 @@
           <a:p>
             <a:fld id="{E9CC885B-4903-4D54-9A93-00025F12DED9}" type="datetimeFigureOut">
               <a:rPr kumimoji="1" lang="ja-JP" altLang="en-US" smtClean="0"/>
-              <a:t>2025/1/8</a:t>
+              <a:t>2025/3/14</a:t>
             </a:fld>
             <a:endParaRPr kumimoji="1" lang="ja-JP" altLang="en-US"/>
           </a:p>
@@ -2050,7 +2050,7 @@
           <a:p>
             <a:fld id="{E9CC885B-4903-4D54-9A93-00025F12DED9}" type="datetimeFigureOut">
               <a:rPr kumimoji="1" lang="ja-JP" altLang="en-US" smtClean="0"/>
-              <a:t>2025/1/8</a:t>
+              <a:t>2025/3/14</a:t>
             </a:fld>
             <a:endParaRPr kumimoji="1" lang="ja-JP" altLang="en-US"/>
           </a:p>
@@ -2191,7 +2191,7 @@
           <a:p>
             <a:fld id="{E9CC885B-4903-4D54-9A93-00025F12DED9}" type="datetimeFigureOut">
               <a:rPr kumimoji="1" lang="ja-JP" altLang="en-US" smtClean="0"/>
-              <a:t>2025/1/8</a:t>
+              <a:t>2025/3/14</a:t>
             </a:fld>
             <a:endParaRPr kumimoji="1" lang="ja-JP" altLang="en-US"/>
           </a:p>
@@ -2304,7 +2304,7 @@
           <a:p>
             <a:fld id="{E9CC885B-4903-4D54-9A93-00025F12DED9}" type="datetimeFigureOut">
               <a:rPr kumimoji="1" lang="ja-JP" altLang="en-US" smtClean="0"/>
-              <a:t>2025/1/8</a:t>
+              <a:t>2025/3/14</a:t>
             </a:fld>
             <a:endParaRPr kumimoji="1" lang="ja-JP" altLang="en-US"/>
           </a:p>
@@ -2647,7 +2647,7 @@
           <a:p>
             <a:fld id="{E9CC885B-4903-4D54-9A93-00025F12DED9}" type="datetimeFigureOut">
               <a:rPr kumimoji="1" lang="ja-JP" altLang="en-US" smtClean="0"/>
-              <a:t>2025/1/8</a:t>
+              <a:t>2025/3/14</a:t>
             </a:fld>
             <a:endParaRPr kumimoji="1" lang="ja-JP" altLang="en-US"/>
           </a:p>
@@ -2935,7 +2935,7 @@
           <a:p>
             <a:fld id="{E9CC885B-4903-4D54-9A93-00025F12DED9}" type="datetimeFigureOut">
               <a:rPr kumimoji="1" lang="ja-JP" altLang="en-US" smtClean="0"/>
-              <a:t>2025/1/8</a:t>
+              <a:t>2025/3/14</a:t>
             </a:fld>
             <a:endParaRPr kumimoji="1" lang="ja-JP" altLang="en-US"/>
           </a:p>
@@ -3208,7 +3208,7 @@
           <a:p>
             <a:fld id="{E9CC885B-4903-4D54-9A93-00025F12DED9}" type="datetimeFigureOut">
               <a:rPr kumimoji="1" lang="ja-JP" altLang="en-US" smtClean="0"/>
-              <a:t>2025/1/8</a:t>
+              <a:t>2025/3/14</a:t>
             </a:fld>
             <a:endParaRPr kumimoji="1" lang="ja-JP" altLang="en-US"/>
           </a:p>
@@ -3791,8 +3791,8 @@
           </a:p>
         </p:txBody>
       </p:sp>
-      <mc:AlternateContent xmlns:mc="http://schemas.openxmlformats.org/markup-compatibility/2006">
-        <mc:Choice xmlns:a14="http://schemas.microsoft.com/office/drawing/2010/main" Requires="a14">
+      <mc:AlternateContent xmlns:mc="http://schemas.openxmlformats.org/markup-compatibility/2006" xmlns:a14="http://schemas.microsoft.com/office/drawing/2010/main">
+        <mc:Choice Requires="a14">
           <p:sp>
             <p:nvSpPr>
               <p:cNvPr id="6" name="テキスト ボックス 5">
@@ -3907,7 +3907,7 @@
                         <m:begChr m:val="|"/>
                         <m:endChr m:val="|"/>
                         <m:ctrlPr>
-                          <a:rPr lang="en-US" altLang="ja-JP" sz="2400" b="0" smtClean="0">
+                          <a:rPr lang="en-US" altLang="ja-JP" sz="2400" b="0" i="1" smtClean="0">
                             <a:latin typeface="Cambria Math" panose="02040503050406030204" pitchFamily="18" charset="0"/>
                           </a:rPr>
                         </m:ctrlPr>
@@ -3947,7 +3947,7 @@
                         <m:begChr m:val="|"/>
                         <m:endChr m:val="|"/>
                         <m:ctrlPr>
-                          <a:rPr lang="en-US" altLang="ja-JP" sz="2400" b="0" smtClean="0">
+                          <a:rPr lang="en-US" altLang="ja-JP" sz="2400" b="0" i="1" smtClean="0">
                             <a:latin typeface="Cambria Math" panose="02040503050406030204" pitchFamily="18" charset="0"/>
                           </a:rPr>
                         </m:ctrlPr>
@@ -3979,7 +3979,7 @@
                     <m:func>
                       <m:funcPr>
                         <m:ctrlPr>
-                          <a:rPr lang="en-US" altLang="ja-JP" sz="2400" b="0" smtClean="0">
+                          <a:rPr lang="en-US" altLang="ja-JP" sz="2400" b="0" i="1" smtClean="0">
                             <a:latin typeface="Cambria Math" panose="02040503050406030204" pitchFamily="18" charset="0"/>
                           </a:rPr>
                         </m:ctrlPr>
@@ -3999,7 +3999,7 @@
                         <m:d>
                           <m:dPr>
                             <m:ctrlPr>
-                              <a:rPr lang="en-US" altLang="ja-JP" sz="2400" b="0" smtClean="0">
+                              <a:rPr lang="en-US" altLang="ja-JP" sz="2400" b="0" i="1" smtClean="0">
                                 <a:latin typeface="Cambria Math" panose="02040503050406030204" pitchFamily="18" charset="0"/>
                               </a:rPr>
                             </m:ctrlPr>
@@ -4071,7 +4071,7 @@
                     <m:func>
                       <m:funcPr>
                         <m:ctrlPr>
-                          <a:rPr lang="en-US" altLang="ja-JP" sz="2400" b="0" smtClean="0">
+                          <a:rPr lang="en-US" altLang="ja-JP" sz="2400" b="0" i="1" smtClean="0">
                             <a:latin typeface="Cambria Math" panose="02040503050406030204" pitchFamily="18" charset="0"/>
                           </a:rPr>
                         </m:ctrlPr>
@@ -4091,7 +4091,7 @@
                         <m:d>
                           <m:dPr>
                             <m:ctrlPr>
-                              <a:rPr lang="en-US" altLang="ja-JP" sz="2400" b="0" smtClean="0">
+                              <a:rPr lang="en-US" altLang="ja-JP" sz="2400" b="0" i="1" smtClean="0">
                                 <a:latin typeface="Cambria Math" panose="02040503050406030204" pitchFamily="18" charset="0"/>
                               </a:rPr>
                             </m:ctrlPr>
@@ -4128,7 +4128,7 @@
                     <m:func>
                       <m:funcPr>
                         <m:ctrlPr>
-                          <a:rPr lang="en-US" altLang="ja-JP" sz="2400" b="1" smtClean="0">
+                          <a:rPr lang="en-US" altLang="ja-JP" sz="2400" b="1" i="1" smtClean="0">
                             <a:solidFill>
                               <a:srgbClr val="FF0000"/>
                             </a:solidFill>
@@ -4151,7 +4151,7 @@
                         <m:d>
                           <m:dPr>
                             <m:ctrlPr>
-                              <a:rPr lang="en-US" altLang="ja-JP" sz="2400" b="1">
+                              <a:rPr lang="en-US" altLang="ja-JP" sz="2400" b="1" i="1">
                                 <a:solidFill>
                                   <a:srgbClr val="FF0000"/>
                                 </a:solidFill>
@@ -4219,7 +4219,7 @@
             </p:txBody>
           </p:sp>
         </mc:Choice>
-        <mc:Fallback>
+        <mc:Fallback xmlns="">
           <p:sp>
             <p:nvSpPr>
               <p:cNvPr id="6" name="テキスト ボックス 5">
@@ -5968,7 +5968,7 @@
         <p:spPr>
           <a:xfrm>
             <a:off x="567542" y="1216429"/>
-            <a:ext cx="8924238" cy="830997"/>
+            <a:ext cx="8924238" cy="461665"/>
           </a:xfrm>
           <a:prstGeom prst="rect">
             <a:avLst/>
@@ -6040,13 +6040,6 @@
             <a:r>
               <a:rPr lang="ja-JP" altLang="en-US" sz="2400" dirty="0"/>
               <a:t>となります。</a:t>
-            </a:r>
-            <a:endParaRPr lang="en-US" altLang="ja-JP" sz="2400" dirty="0"/>
-          </a:p>
-          <a:p>
-            <a:r>
-              <a:rPr lang="ja-JP" altLang="en-US" sz="2400" dirty="0"/>
-              <a:t>（点線の黄色よりも橙の方が右側にある）</a:t>
             </a:r>
             <a:endParaRPr lang="en-US" altLang="ja-JP" sz="2400" dirty="0"/>
           </a:p>
@@ -6341,7 +6334,7 @@
           </a:prstGeom>
           <a:ln w="38100">
             <a:solidFill>
-              <a:srgbClr val="FFFF00"/>
+              <a:srgbClr val="0070C0"/>
             </a:solidFill>
             <a:prstDash val="dash"/>
           </a:ln>
@@ -6385,7 +6378,7 @@
           </a:prstGeom>
           <a:ln w="38100">
             <a:solidFill>
-              <a:srgbClr val="FFC000"/>
+              <a:srgbClr val="FF0000"/>
             </a:solidFill>
             <a:prstDash val="dash"/>
           </a:ln>
@@ -6429,7 +6422,7 @@
           </a:prstGeom>
           <a:ln w="38100">
             <a:solidFill>
-              <a:srgbClr val="FFFF00"/>
+              <a:srgbClr val="0070C0"/>
             </a:solidFill>
             <a:prstDash val="dash"/>
           </a:ln>
@@ -6473,7 +6466,7 @@
           </a:prstGeom>
           <a:ln w="38100">
             <a:solidFill>
-              <a:srgbClr val="FFC000"/>
+              <a:srgbClr val="FF0000"/>
             </a:solidFill>
             <a:prstDash val="dash"/>
           </a:ln>
@@ -7131,8 +7124,8 @@
           </a:p>
         </p:txBody>
       </p:sp>
-      <mc:AlternateContent xmlns:mc="http://schemas.openxmlformats.org/markup-compatibility/2006">
-        <mc:Choice xmlns:a14="http://schemas.microsoft.com/office/drawing/2010/main" Requires="a14">
+      <mc:AlternateContent xmlns:mc="http://schemas.openxmlformats.org/markup-compatibility/2006" xmlns:a14="http://schemas.microsoft.com/office/drawing/2010/main">
+        <mc:Choice Requires="a14">
           <p:sp>
             <p:nvSpPr>
               <p:cNvPr id="6" name="テキスト ボックス 5">
@@ -7291,7 +7284,6 @@
                 <a:endParaRPr kumimoji="1" lang="en-US" altLang="ja-JP" sz="2400" dirty="0"/>
               </a:p>
               <a:p>
-                <a:pPr/>
                 <a14:m>
                   <m:oMath xmlns:m="http://schemas.openxmlformats.org/officeDocument/2006/math">
                     <m:r>
@@ -7419,11 +7411,9 @@
                 <a:endParaRPr kumimoji="1" lang="en-US" altLang="ja-JP" sz="2400" dirty="0"/>
               </a:p>
               <a:p>
-                <a:pPr/>
                 <a:endParaRPr lang="en-US" altLang="ja-JP" sz="2400" dirty="0"/>
               </a:p>
               <a:p>
-                <a:pPr/>
                 <a:r>
                   <a:rPr kumimoji="1" lang="ja-JP" altLang="en-US" sz="2400" dirty="0"/>
                   <a:t>これで視野角に沿ったベクトルが分からなくても計算できます。</a:t>
@@ -7433,7 +7423,7 @@
             </p:txBody>
           </p:sp>
         </mc:Choice>
-        <mc:Fallback>
+        <mc:Fallback xmlns="">
           <p:sp>
             <p:nvSpPr>
               <p:cNvPr id="6" name="テキスト ボックス 5">
